--- a/public/lessons/year-6-maths/spring/week-12/subtract-mixed-numbers/teaching-powerpoint-v1.pptx
+++ b/public/lessons/year-6-maths/spring/week-12/subtract-mixed-numbers/teaching-powerpoint-v1.pptx
@@ -2,24 +2,24 @@
 <file path=ppt/presentation.xml><?xml version="1.0" encoding="utf-8"?>
 <p:presentation xmlns:p="http://schemas.openxmlformats.org/presentationml/2006/main">
   <p:sldMasterIdLst>
-    <p:sldMasterId xmlns:r="http://schemas.openxmlformats.org/officeDocument/2006/relationships" id="2147483648" r:id="R8fc3e354f7214094"/>
+    <p:sldMasterId xmlns:r="http://schemas.openxmlformats.org/officeDocument/2006/relationships" id="2147483648" r:id="Raf477ae1eb924262"/>
   </p:sldMasterIdLst>
   <p:notesMasterIdLst>
-    <p:notesMasterId xmlns:r="http://schemas.openxmlformats.org/officeDocument/2006/relationships" r:id="Rd95391790ba04b05"/>
+    <p:notesMasterId xmlns:r="http://schemas.openxmlformats.org/officeDocument/2006/relationships" r:id="R531ac243d1b84210"/>
   </p:notesMasterIdLst>
   <p:sldIdLst>
-    <p:sldId xmlns:r="http://schemas.openxmlformats.org/officeDocument/2006/relationships" id="256" r:id="R52f996a7c8214c6b"/>
-    <p:sldId xmlns:r="http://schemas.openxmlformats.org/officeDocument/2006/relationships" id="257" r:id="Ra8de4d8dcf51412b"/>
-    <p:sldId xmlns:r="http://schemas.openxmlformats.org/officeDocument/2006/relationships" id="258" r:id="Rad777c43dbad414e"/>
-    <p:sldId xmlns:r="http://schemas.openxmlformats.org/officeDocument/2006/relationships" id="259" r:id="Rffb836eaf1fe4202"/>
-    <p:sldId xmlns:r="http://schemas.openxmlformats.org/officeDocument/2006/relationships" id="260" r:id="R96cd28683b0e47c5"/>
-    <p:sldId xmlns:r="http://schemas.openxmlformats.org/officeDocument/2006/relationships" id="261" r:id="Rb10c27c3dd3c45de"/>
-    <p:sldId xmlns:r="http://schemas.openxmlformats.org/officeDocument/2006/relationships" id="262" r:id="Rc1e92a1d51bc4ab6"/>
-    <p:sldId xmlns:r="http://schemas.openxmlformats.org/officeDocument/2006/relationships" id="263" r:id="R75b2b3a7b11d4c3b"/>
-    <p:sldId xmlns:r="http://schemas.openxmlformats.org/officeDocument/2006/relationships" id="264" r:id="R4eeecd0e2f034503"/>
-    <p:sldId xmlns:r="http://schemas.openxmlformats.org/officeDocument/2006/relationships" id="265" r:id="Rca4af3061d3041e1"/>
-    <p:sldId xmlns:r="http://schemas.openxmlformats.org/officeDocument/2006/relationships" id="266" r:id="R390a365e3d1a4976"/>
-    <p:sldId xmlns:r="http://schemas.openxmlformats.org/officeDocument/2006/relationships" id="267" r:id="Raf715ad4b34b4d9d"/>
+    <p:sldId xmlns:r="http://schemas.openxmlformats.org/officeDocument/2006/relationships" id="256" r:id="R573034893ab54142"/>
+    <p:sldId xmlns:r="http://schemas.openxmlformats.org/officeDocument/2006/relationships" id="257" r:id="Rba9e05d6537c4091"/>
+    <p:sldId xmlns:r="http://schemas.openxmlformats.org/officeDocument/2006/relationships" id="258" r:id="R81beeac35c4f42d2"/>
+    <p:sldId xmlns:r="http://schemas.openxmlformats.org/officeDocument/2006/relationships" id="259" r:id="Rdbb5f3f889fc460e"/>
+    <p:sldId xmlns:r="http://schemas.openxmlformats.org/officeDocument/2006/relationships" id="260" r:id="Rebb7081bb2bb40d4"/>
+    <p:sldId xmlns:r="http://schemas.openxmlformats.org/officeDocument/2006/relationships" id="261" r:id="Rf333524221f64429"/>
+    <p:sldId xmlns:r="http://schemas.openxmlformats.org/officeDocument/2006/relationships" id="262" r:id="Rd0820315a2504904"/>
+    <p:sldId xmlns:r="http://schemas.openxmlformats.org/officeDocument/2006/relationships" id="263" r:id="Re65ff7f932c04183"/>
+    <p:sldId xmlns:r="http://schemas.openxmlformats.org/officeDocument/2006/relationships" id="264" r:id="Rae2d6310951d40a3"/>
+    <p:sldId xmlns:r="http://schemas.openxmlformats.org/officeDocument/2006/relationships" id="265" r:id="R6d31767f207943e5"/>
+    <p:sldId xmlns:r="http://schemas.openxmlformats.org/officeDocument/2006/relationships" id="266" r:id="Ra7dea885f05e4f01"/>
+    <p:sldId xmlns:r="http://schemas.openxmlformats.org/officeDocument/2006/relationships" id="267" r:id="Rcab81eeb47ec49cd"/>
   </p:sldIdLst>
   <p:sldSz cx="12192000" cy="6858000"/>
   <p:notesSz cx="6858000" cy="9144000"/>
@@ -873,7 +873,7 @@
           <a:lstStyle xmlns:a="http://schemas.openxmlformats.org/drawingml/2006/main"/>
           <a:p xmlns:a="http://schemas.openxmlformats.org/drawingml/2006/main">
             <a:r>
-              <a:t>I do. Reveal the question, setup and each calculation stage one click at a time. Pupils watch before copying. Model answer: 2 7/12.</a:t>
+              <a:t>I do. Reveal the question, then reveal each mathematical change one click at a time. Point to the numbers and operation that changed before moving to the next line. Final answer: 2 7/12.</a:t>
             </a:r>
           </a:p>
         </p:txBody>
@@ -1291,7 +1291,7 @@
   </p:cSld>
   <p:clrMap bg1="lt1" tx1="dk1" bg2="lt2" tx2="dk2" accent1="accent1" accent2="accent2" accent3="accent3" accent4="accent4" accent5="accent5" accent6="accent6" hlink="hlink" folHlink="folHlink"/>
   <p:sldLayoutIdLst>
-    <p:sldLayoutId xmlns:r="http://schemas.openxmlformats.org/officeDocument/2006/relationships" id="2147483649" r:id="R4f9f80c1faa44c58"/>
+    <p:sldLayoutId xmlns:r="http://schemas.openxmlformats.org/officeDocument/2006/relationships" id="2147483649" r:id="R6ba6580a063d4f5b"/>
   </p:sldLayoutIdLst>
   <p:txStyles>
     <p:titleStyle>
@@ -1842,7 +1842,7 @@
           <p:cNvPr id="12" name="">
             <a:extLst xmlns:a="http://schemas.openxmlformats.org/drawingml/2006/main">
               <a:ext uri="{FF2B5EF4-FFF2-40B4-BE49-F238E27FC236}">
-                <a16:creationId xmlns:a16="http://schemas.microsoft.com/office/drawing/2014/main" id="{58FC2CE7-6693-4FF9-98E0-BFDB1F57DB8F}"/>
+                <a16:creationId xmlns:a16="http://schemas.microsoft.com/office/drawing/2014/main" id="{103DA914-C5AA-4564-9162-E85849CFE11F}"/>
               </a:ext>
             </a:extLst>
           </p:cNvPr>
@@ -1874,7 +1874,7 @@
           <p:cNvPr id="2" name="">
             <a:extLst xmlns:a="http://schemas.openxmlformats.org/drawingml/2006/main">
               <a:ext uri="{FF2B5EF4-FFF2-40B4-BE49-F238E27FC236}">
-                <a16:creationId xmlns:a16="http://schemas.microsoft.com/office/drawing/2014/main" id="{E5A81A20-3ED3-465D-9675-A55949507B24}"/>
+                <a16:creationId xmlns:a16="http://schemas.microsoft.com/office/drawing/2014/main" id="{6FFBC266-C13B-4B7B-BAAD-147EC914ED68}"/>
               </a:ext>
             </a:extLst>
           </p:cNvPr>
@@ -1931,7 +1931,7 @@
           <p:cNvPr id="3" name="">
             <a:extLst xmlns:a="http://schemas.openxmlformats.org/drawingml/2006/main">
               <a:ext uri="{FF2B5EF4-FFF2-40B4-BE49-F238E27FC236}">
-                <a16:creationId xmlns:a16="http://schemas.microsoft.com/office/drawing/2014/main" id="{D4AA4200-AB1A-4FB4-91B2-B126ACD0102F}"/>
+                <a16:creationId xmlns:a16="http://schemas.microsoft.com/office/drawing/2014/main" id="{14FDA5C2-19AB-4771-86EA-341CAE2FA127}"/>
               </a:ext>
             </a:extLst>
           </p:cNvPr>
@@ -1965,7 +1965,7 @@
           <p:cNvPr id="4" name="">
             <a:extLst xmlns:a="http://schemas.openxmlformats.org/drawingml/2006/main">
               <a:ext uri="{FF2B5EF4-FFF2-40B4-BE49-F238E27FC236}">
-                <a16:creationId xmlns:a16="http://schemas.microsoft.com/office/drawing/2014/main" id="{8A9ABF21-8C20-4A1C-89BF-9830A9C86760}"/>
+                <a16:creationId xmlns:a16="http://schemas.microsoft.com/office/drawing/2014/main" id="{BB21B30C-2E6A-413A-AE39-737394F0FF62}"/>
               </a:ext>
             </a:extLst>
           </p:cNvPr>
@@ -2022,7 +2022,7 @@
           <p:cNvPr id="5" name="">
             <a:extLst xmlns:a="http://schemas.openxmlformats.org/drawingml/2006/main">
               <a:ext uri="{FF2B5EF4-FFF2-40B4-BE49-F238E27FC236}">
-                <a16:creationId xmlns:a16="http://schemas.microsoft.com/office/drawing/2014/main" id="{C13F7327-CEC1-41BF-9836-A5F63FC90B7F}"/>
+                <a16:creationId xmlns:a16="http://schemas.microsoft.com/office/drawing/2014/main" id="{D2B7DB7E-F6DD-482A-907F-D854421DAFD5}"/>
               </a:ext>
             </a:extLst>
           </p:cNvPr>
@@ -2079,7 +2079,7 @@
           <p:cNvPr id="6" name="">
             <a:extLst xmlns:a="http://schemas.openxmlformats.org/drawingml/2006/main">
               <a:ext uri="{FF2B5EF4-FFF2-40B4-BE49-F238E27FC236}">
-                <a16:creationId xmlns:a16="http://schemas.microsoft.com/office/drawing/2014/main" id="{374C13A5-96B1-4D36-BE01-D7D93EA21ED1}"/>
+                <a16:creationId xmlns:a16="http://schemas.microsoft.com/office/drawing/2014/main" id="{45121E86-6E33-48B2-918A-7A2F70F1E8E7}"/>
               </a:ext>
             </a:extLst>
           </p:cNvPr>
@@ -2113,7 +2113,7 @@
           <p:cNvPr id="7" name="">
             <a:extLst xmlns:a="http://schemas.openxmlformats.org/drawingml/2006/main">
               <a:ext uri="{FF2B5EF4-FFF2-40B4-BE49-F238E27FC236}">
-                <a16:creationId xmlns:a16="http://schemas.microsoft.com/office/drawing/2014/main" id="{7B8C9C5F-E89F-4C97-A201-3E728BAE5625}"/>
+                <a16:creationId xmlns:a16="http://schemas.microsoft.com/office/drawing/2014/main" id="{DFB53739-2246-4A73-A484-B87EE280B88A}"/>
               </a:ext>
             </a:extLst>
           </p:cNvPr>
@@ -2170,7 +2170,7 @@
           <p:cNvPr id="8" name="">
             <a:extLst xmlns:a="http://schemas.openxmlformats.org/drawingml/2006/main">
               <a:ext uri="{FF2B5EF4-FFF2-40B4-BE49-F238E27FC236}">
-                <a16:creationId xmlns:a16="http://schemas.microsoft.com/office/drawing/2014/main" id="{404F1C96-8889-4A0F-B377-F5C0A88BAD08}"/>
+                <a16:creationId xmlns:a16="http://schemas.microsoft.com/office/drawing/2014/main" id="{DB4FCA1A-677C-4055-A8F3-71EA719D4A99}"/>
               </a:ext>
             </a:extLst>
           </p:cNvPr>
@@ -2227,7 +2227,7 @@
           <p:cNvPr id="9" name="">
             <a:extLst xmlns:a="http://schemas.openxmlformats.org/drawingml/2006/main">
               <a:ext uri="{FF2B5EF4-FFF2-40B4-BE49-F238E27FC236}">
-                <a16:creationId xmlns:a16="http://schemas.microsoft.com/office/drawing/2014/main" id="{2C98F328-ECAE-4099-8F0E-19140D5CAFC2}"/>
+                <a16:creationId xmlns:a16="http://schemas.microsoft.com/office/drawing/2014/main" id="{4B4A5838-1935-45A0-A815-F21F7A54705A}"/>
               </a:ext>
             </a:extLst>
           </p:cNvPr>
@@ -2284,7 +2284,7 @@
           <p:cNvPr id="10" name="">
             <a:extLst xmlns:a="http://schemas.openxmlformats.org/drawingml/2006/main">
               <a:ext uri="{FF2B5EF4-FFF2-40B4-BE49-F238E27FC236}">
-                <a16:creationId xmlns:a16="http://schemas.microsoft.com/office/drawing/2014/main" id="{DA5BF36A-C119-4801-A8BA-ACEB2FFA2356}"/>
+                <a16:creationId xmlns:a16="http://schemas.microsoft.com/office/drawing/2014/main" id="{F7AFA57F-16F7-4E8E-BD71-B670848C24A9}"/>
               </a:ext>
             </a:extLst>
           </p:cNvPr>
@@ -2341,7 +2341,7 @@
           <p:cNvPr id="11" name="">
             <a:extLst xmlns:a="http://schemas.openxmlformats.org/drawingml/2006/main">
               <a:ext uri="{FF2B5EF4-FFF2-40B4-BE49-F238E27FC236}">
-                <a16:creationId xmlns:a16="http://schemas.microsoft.com/office/drawing/2014/main" id="{CDE5A387-E72A-457A-97DA-A2F621861B68}"/>
+                <a16:creationId xmlns:a16="http://schemas.microsoft.com/office/drawing/2014/main" id="{2469E31B-5EF0-4E63-AD60-AFE14C945B14}"/>
               </a:ext>
             </a:extLst>
           </p:cNvPr>
@@ -2396,7 +2396,7 @@
     </p:spTree>
     <p:extLst>
       <p:ext uri="{BB962C8B-B14F-4D97-AF65-F5344CB8AC3E}">
-        <p14:creationId xmlns:p14="http://schemas.microsoft.com/office/powerpoint/2010/main" val="1150700610"/>
+        <p14:creationId xmlns:p14="http://schemas.microsoft.com/office/powerpoint/2010/main" val="2034343610"/>
       </p:ext>
     </p:extLst>
   </p:cSld>
@@ -2427,7 +2427,7 @@
           <p:cNvPr id="14" name="">
             <a:extLst xmlns:a="http://schemas.openxmlformats.org/drawingml/2006/main">
               <a:ext uri="{FF2B5EF4-FFF2-40B4-BE49-F238E27FC236}">
-                <a16:creationId xmlns:a16="http://schemas.microsoft.com/office/drawing/2014/main" id="{B3FF6034-8202-4B14-A187-8E078CA3691E}"/>
+                <a16:creationId xmlns:a16="http://schemas.microsoft.com/office/drawing/2014/main" id="{F5857F34-F6BA-41AB-84B4-C162A15DC4DB}"/>
               </a:ext>
             </a:extLst>
           </p:cNvPr>
@@ -2459,7 +2459,7 @@
           <p:cNvPr id="2" name="">
             <a:extLst xmlns:a="http://schemas.openxmlformats.org/drawingml/2006/main">
               <a:ext uri="{FF2B5EF4-FFF2-40B4-BE49-F238E27FC236}">
-                <a16:creationId xmlns:a16="http://schemas.microsoft.com/office/drawing/2014/main" id="{C91FEEC5-54B0-422A-B2D6-43B249FE3513}"/>
+                <a16:creationId xmlns:a16="http://schemas.microsoft.com/office/drawing/2014/main" id="{B6C03868-6E8A-47FE-B862-A90CF1B705FD}"/>
               </a:ext>
             </a:extLst>
           </p:cNvPr>
@@ -2516,7 +2516,7 @@
           <p:cNvPr id="3" name="">
             <a:extLst xmlns:a="http://schemas.openxmlformats.org/drawingml/2006/main">
               <a:ext uri="{FF2B5EF4-FFF2-40B4-BE49-F238E27FC236}">
-                <a16:creationId xmlns:a16="http://schemas.microsoft.com/office/drawing/2014/main" id="{5795F872-C909-4D16-B451-4B634912CA46}"/>
+                <a16:creationId xmlns:a16="http://schemas.microsoft.com/office/drawing/2014/main" id="{F446802D-66D7-44C6-91E5-D084849B2C8A}"/>
               </a:ext>
             </a:extLst>
           </p:cNvPr>
@@ -2548,7 +2548,7 @@
           <p:cNvPr id="4" name="">
             <a:extLst xmlns:a="http://schemas.openxmlformats.org/drawingml/2006/main">
               <a:ext uri="{FF2B5EF4-FFF2-40B4-BE49-F238E27FC236}">
-                <a16:creationId xmlns:a16="http://schemas.microsoft.com/office/drawing/2014/main" id="{C8CEBA3A-D41A-4F17-9D33-57C030180123}"/>
+                <a16:creationId xmlns:a16="http://schemas.microsoft.com/office/drawing/2014/main" id="{8B5F290A-BF87-4969-B243-9FFF2F09BF62}"/>
               </a:ext>
             </a:extLst>
           </p:cNvPr>
@@ -2605,7 +2605,7 @@
           <p:cNvPr id="5" name="">
             <a:extLst xmlns:a="http://schemas.openxmlformats.org/drawingml/2006/main">
               <a:ext uri="{FF2B5EF4-FFF2-40B4-BE49-F238E27FC236}">
-                <a16:creationId xmlns:a16="http://schemas.microsoft.com/office/drawing/2014/main" id="{2F1D6A59-DAF2-4881-91C3-377A5DAF60A6}"/>
+                <a16:creationId xmlns:a16="http://schemas.microsoft.com/office/drawing/2014/main" id="{5E9F05E9-9686-4CC9-A11D-B73639777D25}"/>
               </a:ext>
             </a:extLst>
           </p:cNvPr>
@@ -2662,7 +2662,7 @@
           <p:cNvPr id="6" name="">
             <a:extLst xmlns:a="http://schemas.openxmlformats.org/drawingml/2006/main">
               <a:ext uri="{FF2B5EF4-FFF2-40B4-BE49-F238E27FC236}">
-                <a16:creationId xmlns:a16="http://schemas.microsoft.com/office/drawing/2014/main" id="{0FBC9204-4DA8-46DC-B03F-F50B17EE950B}"/>
+                <a16:creationId xmlns:a16="http://schemas.microsoft.com/office/drawing/2014/main" id="{9623C864-E4FA-49EC-A219-5C2535B7E05C}"/>
               </a:ext>
             </a:extLst>
           </p:cNvPr>
@@ -2719,7 +2719,7 @@
           <p:cNvPr id="7" name="">
             <a:extLst xmlns:a="http://schemas.openxmlformats.org/drawingml/2006/main">
               <a:ext uri="{FF2B5EF4-FFF2-40B4-BE49-F238E27FC236}">
-                <a16:creationId xmlns:a16="http://schemas.microsoft.com/office/drawing/2014/main" id="{6E988A44-0E59-4F8E-934A-5313D7B358A4}"/>
+                <a16:creationId xmlns:a16="http://schemas.microsoft.com/office/drawing/2014/main" id="{A9CD85DF-5632-45C9-B5E6-05EC90A80594}"/>
               </a:ext>
             </a:extLst>
           </p:cNvPr>
@@ -2751,7 +2751,7 @@
           <p:cNvPr id="8" name="">
             <a:extLst xmlns:a="http://schemas.openxmlformats.org/drawingml/2006/main">
               <a:ext uri="{FF2B5EF4-FFF2-40B4-BE49-F238E27FC236}">
-                <a16:creationId xmlns:a16="http://schemas.microsoft.com/office/drawing/2014/main" id="{F531BC73-EC24-4B9A-BEE5-FABBBC345417}"/>
+                <a16:creationId xmlns:a16="http://schemas.microsoft.com/office/drawing/2014/main" id="{1EA83B2C-26D1-4A1B-B01C-B5D280C56F9A}"/>
               </a:ext>
             </a:extLst>
           </p:cNvPr>
@@ -2808,7 +2808,7 @@
           <p:cNvPr id="9" name="">
             <a:extLst xmlns:a="http://schemas.openxmlformats.org/drawingml/2006/main">
               <a:ext uri="{FF2B5EF4-FFF2-40B4-BE49-F238E27FC236}">
-                <a16:creationId xmlns:a16="http://schemas.microsoft.com/office/drawing/2014/main" id="{FD8CD0B8-BABF-45C1-99EE-E709887F13EB}"/>
+                <a16:creationId xmlns:a16="http://schemas.microsoft.com/office/drawing/2014/main" id="{4A881EA6-C5D5-45BE-9EA0-A787C26BEA73}"/>
               </a:ext>
             </a:extLst>
           </p:cNvPr>
@@ -2865,7 +2865,7 @@
           <p:cNvPr id="10" name="">
             <a:extLst xmlns:a="http://schemas.openxmlformats.org/drawingml/2006/main">
               <a:ext uri="{FF2B5EF4-FFF2-40B4-BE49-F238E27FC236}">
-                <a16:creationId xmlns:a16="http://schemas.microsoft.com/office/drawing/2014/main" id="{D037D27C-8848-4FC0-A61F-4CF06CA63A01}"/>
+                <a16:creationId xmlns:a16="http://schemas.microsoft.com/office/drawing/2014/main" id="{C3CBC31E-CDF3-45EE-BA9F-FAD0571DD2DF}"/>
               </a:ext>
             </a:extLst>
           </p:cNvPr>
@@ -2922,7 +2922,7 @@
           <p:cNvPr id="11" name="">
             <a:extLst xmlns:a="http://schemas.openxmlformats.org/drawingml/2006/main">
               <a:ext uri="{FF2B5EF4-FFF2-40B4-BE49-F238E27FC236}">
-                <a16:creationId xmlns:a16="http://schemas.microsoft.com/office/drawing/2014/main" id="{2CDBA7E8-085E-4C57-AD04-3B6303F5F46E}"/>
+                <a16:creationId xmlns:a16="http://schemas.microsoft.com/office/drawing/2014/main" id="{60E06D69-C6CB-45C7-B793-ED03D3B1098B}"/>
               </a:ext>
             </a:extLst>
           </p:cNvPr>
@@ -2979,7 +2979,7 @@
           <p:cNvPr id="12" name="">
             <a:extLst xmlns:a="http://schemas.openxmlformats.org/drawingml/2006/main">
               <a:ext uri="{FF2B5EF4-FFF2-40B4-BE49-F238E27FC236}">
-                <a16:creationId xmlns:a16="http://schemas.microsoft.com/office/drawing/2014/main" id="{AC789549-CB70-4BF3-AC2A-A902E4BDD9A5}"/>
+                <a16:creationId xmlns:a16="http://schemas.microsoft.com/office/drawing/2014/main" id="{92EA8FBE-B68B-446A-9D19-9263135B4163}"/>
               </a:ext>
             </a:extLst>
           </p:cNvPr>
@@ -3036,7 +3036,7 @@
           <p:cNvPr id="13" name="">
             <a:extLst xmlns:a="http://schemas.openxmlformats.org/drawingml/2006/main">
               <a:ext uri="{FF2B5EF4-FFF2-40B4-BE49-F238E27FC236}">
-                <a16:creationId xmlns:a16="http://schemas.microsoft.com/office/drawing/2014/main" id="{2A55C066-8B8D-48A0-8B10-352CDA5C9673}"/>
+                <a16:creationId xmlns:a16="http://schemas.microsoft.com/office/drawing/2014/main" id="{D8A9A12C-F8DF-439B-9663-4E968FCD094F}"/>
               </a:ext>
             </a:extLst>
           </p:cNvPr>
@@ -3091,7 +3091,7 @@
     </p:spTree>
     <p:extLst>
       <p:ext uri="{BB962C8B-B14F-4D97-AF65-F5344CB8AC3E}">
-        <p14:creationId xmlns:p14="http://schemas.microsoft.com/office/powerpoint/2010/main" val="1982870483"/>
+        <p14:creationId xmlns:p14="http://schemas.microsoft.com/office/powerpoint/2010/main" val="814313328"/>
       </p:ext>
     </p:extLst>
   </p:cSld>
@@ -3292,7 +3292,7 @@
           <p:cNvPr id="19" name="">
             <a:extLst xmlns:a="http://schemas.openxmlformats.org/drawingml/2006/main">
               <a:ext uri="{FF2B5EF4-FFF2-40B4-BE49-F238E27FC236}">
-                <a16:creationId xmlns:a16="http://schemas.microsoft.com/office/drawing/2014/main" id="{25E7D634-5764-42E7-9A9D-B490BF671EDD}"/>
+                <a16:creationId xmlns:a16="http://schemas.microsoft.com/office/drawing/2014/main" id="{36AA49EF-4DC2-461B-A3C5-E5CA569579D4}"/>
               </a:ext>
             </a:extLst>
           </p:cNvPr>
@@ -3324,7 +3324,7 @@
           <p:cNvPr id="2" name="">
             <a:extLst xmlns:a="http://schemas.openxmlformats.org/drawingml/2006/main">
               <a:ext uri="{FF2B5EF4-FFF2-40B4-BE49-F238E27FC236}">
-                <a16:creationId xmlns:a16="http://schemas.microsoft.com/office/drawing/2014/main" id="{77DC047F-D14F-43A1-AE0D-591CC0B2C37E}"/>
+                <a16:creationId xmlns:a16="http://schemas.microsoft.com/office/drawing/2014/main" id="{B7E163C4-A966-412A-BF50-4F0293A34245}"/>
               </a:ext>
             </a:extLst>
           </p:cNvPr>
@@ -3381,7 +3381,7 @@
           <p:cNvPr id="3" name="">
             <a:extLst xmlns:a="http://schemas.openxmlformats.org/drawingml/2006/main">
               <a:ext uri="{FF2B5EF4-FFF2-40B4-BE49-F238E27FC236}">
-                <a16:creationId xmlns:a16="http://schemas.microsoft.com/office/drawing/2014/main" id="{4D1B98E8-CCC0-4F94-A049-30B84DC422B1}"/>
+                <a16:creationId xmlns:a16="http://schemas.microsoft.com/office/drawing/2014/main" id="{2C5FFE1F-2F94-40C0-BD1A-DD5996CCB966}"/>
               </a:ext>
             </a:extLst>
           </p:cNvPr>
@@ -3413,7 +3413,7 @@
           <p:cNvPr id="4" name="">
             <a:extLst xmlns:a="http://schemas.openxmlformats.org/drawingml/2006/main">
               <a:ext uri="{FF2B5EF4-FFF2-40B4-BE49-F238E27FC236}">
-                <a16:creationId xmlns:a16="http://schemas.microsoft.com/office/drawing/2014/main" id="{28DBBD20-B3E3-4EAA-9E38-786DF2D971DD}"/>
+                <a16:creationId xmlns:a16="http://schemas.microsoft.com/office/drawing/2014/main" id="{B2579962-6E87-4CF4-A245-C9D819DC26F0}"/>
               </a:ext>
             </a:extLst>
           </p:cNvPr>
@@ -3470,7 +3470,7 @@
           <p:cNvPr id="5" name="">
             <a:extLst xmlns:a="http://schemas.openxmlformats.org/drawingml/2006/main">
               <a:ext uri="{FF2B5EF4-FFF2-40B4-BE49-F238E27FC236}">
-                <a16:creationId xmlns:a16="http://schemas.microsoft.com/office/drawing/2014/main" id="{6391D22B-9093-4BDB-B23F-B6928223A388}"/>
+                <a16:creationId xmlns:a16="http://schemas.microsoft.com/office/drawing/2014/main" id="{5688E344-A715-4369-9412-B8A09CF90740}"/>
               </a:ext>
             </a:extLst>
           </p:cNvPr>
@@ -3527,7 +3527,7 @@
           <p:cNvPr id="6" name="">
             <a:extLst xmlns:a="http://schemas.openxmlformats.org/drawingml/2006/main">
               <a:ext uri="{FF2B5EF4-FFF2-40B4-BE49-F238E27FC236}">
-                <a16:creationId xmlns:a16="http://schemas.microsoft.com/office/drawing/2014/main" id="{080A7F46-91D2-4075-90FA-858464A9AC23}"/>
+                <a16:creationId xmlns:a16="http://schemas.microsoft.com/office/drawing/2014/main" id="{CBD342CF-07D7-4941-B010-5A09DB84826A}"/>
               </a:ext>
             </a:extLst>
           </p:cNvPr>
@@ -3584,7 +3584,7 @@
           <p:cNvPr id="7" name="">
             <a:extLst xmlns:a="http://schemas.openxmlformats.org/drawingml/2006/main">
               <a:ext uri="{FF2B5EF4-FFF2-40B4-BE49-F238E27FC236}">
-                <a16:creationId xmlns:a16="http://schemas.microsoft.com/office/drawing/2014/main" id="{6FD2D784-E39B-4612-B10F-83075E886910}"/>
+                <a16:creationId xmlns:a16="http://schemas.microsoft.com/office/drawing/2014/main" id="{FA338699-B5BC-4E6B-B324-CA92E3875F08}"/>
               </a:ext>
             </a:extLst>
           </p:cNvPr>
@@ -3616,7 +3616,7 @@
           <p:cNvPr id="8" name="">
             <a:extLst xmlns:a="http://schemas.openxmlformats.org/drawingml/2006/main">
               <a:ext uri="{FF2B5EF4-FFF2-40B4-BE49-F238E27FC236}">
-                <a16:creationId xmlns:a16="http://schemas.microsoft.com/office/drawing/2014/main" id="{DAAE4CB8-9F69-4BAB-BA9E-1635006A51C1}"/>
+                <a16:creationId xmlns:a16="http://schemas.microsoft.com/office/drawing/2014/main" id="{91AE271D-B6CA-4EF4-8760-B5A65D557249}"/>
               </a:ext>
             </a:extLst>
           </p:cNvPr>
@@ -3673,7 +3673,7 @@
           <p:cNvPr id="9" name="">
             <a:extLst xmlns:a="http://schemas.openxmlformats.org/drawingml/2006/main">
               <a:ext uri="{FF2B5EF4-FFF2-40B4-BE49-F238E27FC236}">
-                <a16:creationId xmlns:a16="http://schemas.microsoft.com/office/drawing/2014/main" id="{E72962E8-9D2D-4064-B0DF-CFF6D7E1CCFA}"/>
+                <a16:creationId xmlns:a16="http://schemas.microsoft.com/office/drawing/2014/main" id="{708F09A5-425D-4524-B4D4-153F9A29CAA6}"/>
               </a:ext>
             </a:extLst>
           </p:cNvPr>
@@ -3730,7 +3730,7 @@
           <p:cNvPr id="10" name="">
             <a:extLst xmlns:a="http://schemas.openxmlformats.org/drawingml/2006/main">
               <a:ext uri="{FF2B5EF4-FFF2-40B4-BE49-F238E27FC236}">
-                <a16:creationId xmlns:a16="http://schemas.microsoft.com/office/drawing/2014/main" id="{40CDE535-CAC1-41C5-B9E4-28F8E3A8051C}"/>
+                <a16:creationId xmlns:a16="http://schemas.microsoft.com/office/drawing/2014/main" id="{329A9D7C-513C-4477-A6D2-D64DD3A5CEC8}"/>
               </a:ext>
             </a:extLst>
           </p:cNvPr>
@@ -3787,7 +3787,7 @@
           <p:cNvPr id="11" name="">
             <a:extLst xmlns:a="http://schemas.openxmlformats.org/drawingml/2006/main">
               <a:ext uri="{FF2B5EF4-FFF2-40B4-BE49-F238E27FC236}">
-                <a16:creationId xmlns:a16="http://schemas.microsoft.com/office/drawing/2014/main" id="{95DB9436-39ED-4025-B16A-F55C27B6AE15}"/>
+                <a16:creationId xmlns:a16="http://schemas.microsoft.com/office/drawing/2014/main" id="{9A17A132-538C-4788-9FC1-8CF1FC862986}"/>
               </a:ext>
             </a:extLst>
           </p:cNvPr>
@@ -3821,7 +3821,7 @@
           <p:cNvPr id="12" name="">
             <a:extLst xmlns:a="http://schemas.openxmlformats.org/drawingml/2006/main">
               <a:ext uri="{FF2B5EF4-FFF2-40B4-BE49-F238E27FC236}">
-                <a16:creationId xmlns:a16="http://schemas.microsoft.com/office/drawing/2014/main" id="{B0F3D597-A3D3-4C83-98AC-B5A3B3DC533D}"/>
+                <a16:creationId xmlns:a16="http://schemas.microsoft.com/office/drawing/2014/main" id="{58014D9D-27A8-4E79-AFE5-59F214CE69D5}"/>
               </a:ext>
             </a:extLst>
           </p:cNvPr>
@@ -3878,7 +3878,7 @@
           <p:cNvPr id="13" name="">
             <a:extLst xmlns:a="http://schemas.openxmlformats.org/drawingml/2006/main">
               <a:ext uri="{FF2B5EF4-FFF2-40B4-BE49-F238E27FC236}">
-                <a16:creationId xmlns:a16="http://schemas.microsoft.com/office/drawing/2014/main" id="{B5BA7C8E-803B-48A1-AB96-7D1FE7D6EADE}"/>
+                <a16:creationId xmlns:a16="http://schemas.microsoft.com/office/drawing/2014/main" id="{4AF67205-B14E-4E07-B377-5A177927C620}"/>
               </a:ext>
             </a:extLst>
           </p:cNvPr>
@@ -3935,7 +3935,7 @@
           <p:cNvPr id="14" name="">
             <a:extLst xmlns:a="http://schemas.openxmlformats.org/drawingml/2006/main">
               <a:ext uri="{FF2B5EF4-FFF2-40B4-BE49-F238E27FC236}">
-                <a16:creationId xmlns:a16="http://schemas.microsoft.com/office/drawing/2014/main" id="{6EE558E3-E440-47B2-BAE8-0876A9559A9C}"/>
+                <a16:creationId xmlns:a16="http://schemas.microsoft.com/office/drawing/2014/main" id="{94448E54-5294-42D2-AD01-4290FE5D299D}"/>
               </a:ext>
             </a:extLst>
           </p:cNvPr>
@@ -3992,7 +3992,7 @@
           <p:cNvPr id="15" name="">
             <a:extLst xmlns:a="http://schemas.openxmlformats.org/drawingml/2006/main">
               <a:ext uri="{FF2B5EF4-FFF2-40B4-BE49-F238E27FC236}">
-                <a16:creationId xmlns:a16="http://schemas.microsoft.com/office/drawing/2014/main" id="{DFFA4783-A974-4F67-9B1A-3078F0957ABC}"/>
+                <a16:creationId xmlns:a16="http://schemas.microsoft.com/office/drawing/2014/main" id="{FF5EC701-4EEA-4FBE-9EEC-DEE8BFBEDD9F}"/>
               </a:ext>
             </a:extLst>
           </p:cNvPr>
@@ -4026,7 +4026,7 @@
           <p:cNvPr id="16" name="">
             <a:extLst xmlns:a="http://schemas.openxmlformats.org/drawingml/2006/main">
               <a:ext uri="{FF2B5EF4-FFF2-40B4-BE49-F238E27FC236}">
-                <a16:creationId xmlns:a16="http://schemas.microsoft.com/office/drawing/2014/main" id="{5F346E07-9416-491F-8CE3-E51FEBD5619A}"/>
+                <a16:creationId xmlns:a16="http://schemas.microsoft.com/office/drawing/2014/main" id="{64B5D933-254F-4D51-A628-6873DAE8D60C}"/>
               </a:ext>
             </a:extLst>
           </p:cNvPr>
@@ -4083,7 +4083,7 @@
           <p:cNvPr id="17" name="">
             <a:extLst xmlns:a="http://schemas.openxmlformats.org/drawingml/2006/main">
               <a:ext uri="{FF2B5EF4-FFF2-40B4-BE49-F238E27FC236}">
-                <a16:creationId xmlns:a16="http://schemas.microsoft.com/office/drawing/2014/main" id="{F661C075-1389-4989-AAA4-3EE619E7003F}"/>
+                <a16:creationId xmlns:a16="http://schemas.microsoft.com/office/drawing/2014/main" id="{35D7DCCD-8BA9-4C70-A43C-D69D9C92E300}"/>
               </a:ext>
             </a:extLst>
           </p:cNvPr>
@@ -4140,7 +4140,7 @@
           <p:cNvPr id="18" name="">
             <a:extLst xmlns:a="http://schemas.openxmlformats.org/drawingml/2006/main">
               <a:ext uri="{FF2B5EF4-FFF2-40B4-BE49-F238E27FC236}">
-                <a16:creationId xmlns:a16="http://schemas.microsoft.com/office/drawing/2014/main" id="{C3578705-A04D-4E73-8FAD-BF7C1F0B475C}"/>
+                <a16:creationId xmlns:a16="http://schemas.microsoft.com/office/drawing/2014/main" id="{F8D9F630-3A08-45EA-9D0D-91A7C68F9C21}"/>
               </a:ext>
             </a:extLst>
           </p:cNvPr>
@@ -4195,7 +4195,7 @@
     </p:spTree>
     <p:extLst>
       <p:ext uri="{BB962C8B-B14F-4D97-AF65-F5344CB8AC3E}">
-        <p14:creationId xmlns:p14="http://schemas.microsoft.com/office/powerpoint/2010/main" val="765309017"/>
+        <p14:creationId xmlns:p14="http://schemas.microsoft.com/office/powerpoint/2010/main" val="2076423072"/>
       </p:ext>
     </p:extLst>
   </p:cSld>
@@ -4350,7 +4350,7 @@
           <p:cNvPr id="23" name="">
             <a:extLst xmlns:a="http://schemas.openxmlformats.org/drawingml/2006/main">
               <a:ext uri="{FF2B5EF4-FFF2-40B4-BE49-F238E27FC236}">
-                <a16:creationId xmlns:a16="http://schemas.microsoft.com/office/drawing/2014/main" id="{290A4B56-C4B6-429A-AC44-7E0B7EDD54A2}"/>
+                <a16:creationId xmlns:a16="http://schemas.microsoft.com/office/drawing/2014/main" id="{C7921F95-1D8B-4F37-AB53-F2DBC180EF79}"/>
               </a:ext>
             </a:extLst>
           </p:cNvPr>
@@ -4382,7 +4382,7 @@
           <p:cNvPr id="2" name="">
             <a:extLst xmlns:a="http://schemas.openxmlformats.org/drawingml/2006/main">
               <a:ext uri="{FF2B5EF4-FFF2-40B4-BE49-F238E27FC236}">
-                <a16:creationId xmlns:a16="http://schemas.microsoft.com/office/drawing/2014/main" id="{F4A3C033-84E3-42F7-9244-4113D71E003D}"/>
+                <a16:creationId xmlns:a16="http://schemas.microsoft.com/office/drawing/2014/main" id="{0A65302F-2FE4-47CB-8CB0-8197F563BF68}"/>
               </a:ext>
             </a:extLst>
           </p:cNvPr>
@@ -4439,7 +4439,7 @@
           <p:cNvPr id="3" name="">
             <a:extLst xmlns:a="http://schemas.openxmlformats.org/drawingml/2006/main">
               <a:ext uri="{FF2B5EF4-FFF2-40B4-BE49-F238E27FC236}">
-                <a16:creationId xmlns:a16="http://schemas.microsoft.com/office/drawing/2014/main" id="{AD779D71-9761-4582-963E-3B23113B6EAB}"/>
+                <a16:creationId xmlns:a16="http://schemas.microsoft.com/office/drawing/2014/main" id="{DAB87443-AEE9-479F-97A4-AC88C2FFDD57}"/>
               </a:ext>
             </a:extLst>
           </p:cNvPr>
@@ -4471,7 +4471,7 @@
           <p:cNvPr id="4" name="">
             <a:extLst xmlns:a="http://schemas.openxmlformats.org/drawingml/2006/main">
               <a:ext uri="{FF2B5EF4-FFF2-40B4-BE49-F238E27FC236}">
-                <a16:creationId xmlns:a16="http://schemas.microsoft.com/office/drawing/2014/main" id="{29017482-A05E-4F50-A419-C9C6526787DC}"/>
+                <a16:creationId xmlns:a16="http://schemas.microsoft.com/office/drawing/2014/main" id="{13768FC3-E29F-4652-9BEF-95B451B2B2B0}"/>
               </a:ext>
             </a:extLst>
           </p:cNvPr>
@@ -4528,7 +4528,7 @@
           <p:cNvPr id="5" name="">
             <a:extLst xmlns:a="http://schemas.openxmlformats.org/drawingml/2006/main">
               <a:ext uri="{FF2B5EF4-FFF2-40B4-BE49-F238E27FC236}">
-                <a16:creationId xmlns:a16="http://schemas.microsoft.com/office/drawing/2014/main" id="{9241C150-6B34-403C-BE37-12F4F071E1C1}"/>
+                <a16:creationId xmlns:a16="http://schemas.microsoft.com/office/drawing/2014/main" id="{09A67382-740F-4197-B154-0A730FF14D69}"/>
               </a:ext>
             </a:extLst>
           </p:cNvPr>
@@ -4585,7 +4585,7 @@
           <p:cNvPr id="6" name="">
             <a:extLst xmlns:a="http://schemas.openxmlformats.org/drawingml/2006/main">
               <a:ext uri="{FF2B5EF4-FFF2-40B4-BE49-F238E27FC236}">
-                <a16:creationId xmlns:a16="http://schemas.microsoft.com/office/drawing/2014/main" id="{6ABD0686-7BA4-4CF7-AF7F-FDC6D197DA97}"/>
+                <a16:creationId xmlns:a16="http://schemas.microsoft.com/office/drawing/2014/main" id="{961EC235-29B6-4D10-8A08-692C296C6390}"/>
               </a:ext>
             </a:extLst>
           </p:cNvPr>
@@ -4642,7 +4642,7 @@
           <p:cNvPr id="7" name="">
             <a:extLst xmlns:a="http://schemas.openxmlformats.org/drawingml/2006/main">
               <a:ext uri="{FF2B5EF4-FFF2-40B4-BE49-F238E27FC236}">
-                <a16:creationId xmlns:a16="http://schemas.microsoft.com/office/drawing/2014/main" id="{7750A304-018E-44F2-87BB-59DED36F6424}"/>
+                <a16:creationId xmlns:a16="http://schemas.microsoft.com/office/drawing/2014/main" id="{E39B41BF-6EB3-45CA-B9D0-BBA2BC60B68A}"/>
               </a:ext>
             </a:extLst>
           </p:cNvPr>
@@ -4674,7 +4674,7 @@
           <p:cNvPr id="8" name="">
             <a:extLst xmlns:a="http://schemas.openxmlformats.org/drawingml/2006/main">
               <a:ext uri="{FF2B5EF4-FFF2-40B4-BE49-F238E27FC236}">
-                <a16:creationId xmlns:a16="http://schemas.microsoft.com/office/drawing/2014/main" id="{6FCA7D57-DBC6-43C9-87C4-04E6BFC2CFB6}"/>
+                <a16:creationId xmlns:a16="http://schemas.microsoft.com/office/drawing/2014/main" id="{11627A84-4354-4EAA-8271-94BE3178D1EB}"/>
               </a:ext>
             </a:extLst>
           </p:cNvPr>
@@ -4731,7 +4731,7 @@
           <p:cNvPr id="9" name="">
             <a:extLst xmlns:a="http://schemas.openxmlformats.org/drawingml/2006/main">
               <a:ext uri="{FF2B5EF4-FFF2-40B4-BE49-F238E27FC236}">
-                <a16:creationId xmlns:a16="http://schemas.microsoft.com/office/drawing/2014/main" id="{ACF84685-372C-47CF-A3D7-736C10E94D6C}"/>
+                <a16:creationId xmlns:a16="http://schemas.microsoft.com/office/drawing/2014/main" id="{B5E02164-3710-475A-B691-BA55AA214891}"/>
               </a:ext>
             </a:extLst>
           </p:cNvPr>
@@ -4788,7 +4788,7 @@
           <p:cNvPr id="10" name="">
             <a:extLst xmlns:a="http://schemas.openxmlformats.org/drawingml/2006/main">
               <a:ext uri="{FF2B5EF4-FFF2-40B4-BE49-F238E27FC236}">
-                <a16:creationId xmlns:a16="http://schemas.microsoft.com/office/drawing/2014/main" id="{A9CBCB8E-72D7-40E4-9F8A-43B320B8A8A0}"/>
+                <a16:creationId xmlns:a16="http://schemas.microsoft.com/office/drawing/2014/main" id="{3FF75973-F326-4BA2-82AF-CC92973489D9}"/>
               </a:ext>
             </a:extLst>
           </p:cNvPr>
@@ -4822,7 +4822,7 @@
           <p:cNvPr id="11" name="">
             <a:extLst xmlns:a="http://schemas.openxmlformats.org/drawingml/2006/main">
               <a:ext uri="{FF2B5EF4-FFF2-40B4-BE49-F238E27FC236}">
-                <a16:creationId xmlns:a16="http://schemas.microsoft.com/office/drawing/2014/main" id="{E57D793A-0C70-41C0-AF1A-1D7470FF3D6C}"/>
+                <a16:creationId xmlns:a16="http://schemas.microsoft.com/office/drawing/2014/main" id="{8606659E-2D30-4DF1-B97F-C9C2B13057F4}"/>
               </a:ext>
             </a:extLst>
           </p:cNvPr>
@@ -4854,7 +4854,7 @@
           <p:cNvPr id="12" name="">
             <a:extLst xmlns:a="http://schemas.openxmlformats.org/drawingml/2006/main">
               <a:ext uri="{FF2B5EF4-FFF2-40B4-BE49-F238E27FC236}">
-                <a16:creationId xmlns:a16="http://schemas.microsoft.com/office/drawing/2014/main" id="{33ABE0C4-8985-4B3F-9D04-1760DA79427C}"/>
+                <a16:creationId xmlns:a16="http://schemas.microsoft.com/office/drawing/2014/main" id="{23EB8DF7-B1BB-4022-B114-01499E666B23}"/>
               </a:ext>
             </a:extLst>
           </p:cNvPr>
@@ -4911,7 +4911,7 @@
           <p:cNvPr id="13" name="">
             <a:extLst xmlns:a="http://schemas.openxmlformats.org/drawingml/2006/main">
               <a:ext uri="{FF2B5EF4-FFF2-40B4-BE49-F238E27FC236}">
-                <a16:creationId xmlns:a16="http://schemas.microsoft.com/office/drawing/2014/main" id="{3FD8B13E-0B25-47B1-B735-943BB14458CC}"/>
+                <a16:creationId xmlns:a16="http://schemas.microsoft.com/office/drawing/2014/main" id="{A454C8BF-74B6-4207-A0FB-B201AC1A2468}"/>
               </a:ext>
             </a:extLst>
           </p:cNvPr>
@@ -4968,7 +4968,7 @@
           <p:cNvPr id="14" name="">
             <a:extLst xmlns:a="http://schemas.openxmlformats.org/drawingml/2006/main">
               <a:ext uri="{FF2B5EF4-FFF2-40B4-BE49-F238E27FC236}">
-                <a16:creationId xmlns:a16="http://schemas.microsoft.com/office/drawing/2014/main" id="{39D6F37C-9473-4B63-AE76-53C4B09772BB}"/>
+                <a16:creationId xmlns:a16="http://schemas.microsoft.com/office/drawing/2014/main" id="{76655B85-2BD8-4848-876F-07816BB85A78}"/>
               </a:ext>
             </a:extLst>
           </p:cNvPr>
@@ -5002,7 +5002,7 @@
           <p:cNvPr id="15" name="">
             <a:extLst xmlns:a="http://schemas.openxmlformats.org/drawingml/2006/main">
               <a:ext uri="{FF2B5EF4-FFF2-40B4-BE49-F238E27FC236}">
-                <a16:creationId xmlns:a16="http://schemas.microsoft.com/office/drawing/2014/main" id="{063F2657-59CE-4356-84FD-B1558EB23D1F}"/>
+                <a16:creationId xmlns:a16="http://schemas.microsoft.com/office/drawing/2014/main" id="{8CCBBF10-F971-4C42-9665-8C4BAF324218}"/>
               </a:ext>
             </a:extLst>
           </p:cNvPr>
@@ -5034,7 +5034,7 @@
           <p:cNvPr id="16" name="">
             <a:extLst xmlns:a="http://schemas.openxmlformats.org/drawingml/2006/main">
               <a:ext uri="{FF2B5EF4-FFF2-40B4-BE49-F238E27FC236}">
-                <a16:creationId xmlns:a16="http://schemas.microsoft.com/office/drawing/2014/main" id="{2EB55ECC-BFB7-4A97-837D-B0F7D1EC8990}"/>
+                <a16:creationId xmlns:a16="http://schemas.microsoft.com/office/drawing/2014/main" id="{CB6267B8-3A06-4653-BC1B-C261BB5824AE}"/>
               </a:ext>
             </a:extLst>
           </p:cNvPr>
@@ -5091,7 +5091,7 @@
           <p:cNvPr id="17" name="">
             <a:extLst xmlns:a="http://schemas.openxmlformats.org/drawingml/2006/main">
               <a:ext uri="{FF2B5EF4-FFF2-40B4-BE49-F238E27FC236}">
-                <a16:creationId xmlns:a16="http://schemas.microsoft.com/office/drawing/2014/main" id="{EB67D0C8-C316-45E4-8330-80344F4DC187}"/>
+                <a16:creationId xmlns:a16="http://schemas.microsoft.com/office/drawing/2014/main" id="{15730134-16D2-4A88-88CB-8F3BD1C3861F}"/>
               </a:ext>
             </a:extLst>
           </p:cNvPr>
@@ -5148,7 +5148,7 @@
           <p:cNvPr id="18" name="">
             <a:extLst xmlns:a="http://schemas.openxmlformats.org/drawingml/2006/main">
               <a:ext uri="{FF2B5EF4-FFF2-40B4-BE49-F238E27FC236}">
-                <a16:creationId xmlns:a16="http://schemas.microsoft.com/office/drawing/2014/main" id="{D1213767-8274-4E68-8810-7AF798771DF6}"/>
+                <a16:creationId xmlns:a16="http://schemas.microsoft.com/office/drawing/2014/main" id="{05AEA17C-600D-4A7C-BFBA-6D9DF3529F44}"/>
               </a:ext>
             </a:extLst>
           </p:cNvPr>
@@ -5182,7 +5182,7 @@
           <p:cNvPr id="19" name="">
             <a:extLst xmlns:a="http://schemas.openxmlformats.org/drawingml/2006/main">
               <a:ext uri="{FF2B5EF4-FFF2-40B4-BE49-F238E27FC236}">
-                <a16:creationId xmlns:a16="http://schemas.microsoft.com/office/drawing/2014/main" id="{07831AC3-7123-4D25-9110-2F91D3B0247F}"/>
+                <a16:creationId xmlns:a16="http://schemas.microsoft.com/office/drawing/2014/main" id="{56B17BE6-BB01-44E4-8AFE-BAF4B637AD0D}"/>
               </a:ext>
             </a:extLst>
           </p:cNvPr>
@@ -5214,7 +5214,7 @@
           <p:cNvPr id="20" name="">
             <a:extLst xmlns:a="http://schemas.openxmlformats.org/drawingml/2006/main">
               <a:ext uri="{FF2B5EF4-FFF2-40B4-BE49-F238E27FC236}">
-                <a16:creationId xmlns:a16="http://schemas.microsoft.com/office/drawing/2014/main" id="{5F7A8C20-A3AC-41C2-9735-5F91D873A29C}"/>
+                <a16:creationId xmlns:a16="http://schemas.microsoft.com/office/drawing/2014/main" id="{C5A89711-022E-4723-8B6F-21860737F3C0}"/>
               </a:ext>
             </a:extLst>
           </p:cNvPr>
@@ -5271,7 +5271,7 @@
           <p:cNvPr id="21" name="">
             <a:extLst xmlns:a="http://schemas.openxmlformats.org/drawingml/2006/main">
               <a:ext uri="{FF2B5EF4-FFF2-40B4-BE49-F238E27FC236}">
-                <a16:creationId xmlns:a16="http://schemas.microsoft.com/office/drawing/2014/main" id="{B305A980-F280-488B-A2C3-BCB062D5EC29}"/>
+                <a16:creationId xmlns:a16="http://schemas.microsoft.com/office/drawing/2014/main" id="{F771B1C5-39A1-4872-A832-52FA81484D10}"/>
               </a:ext>
             </a:extLst>
           </p:cNvPr>
@@ -5328,7 +5328,7 @@
           <p:cNvPr id="22" name="">
             <a:extLst xmlns:a="http://schemas.openxmlformats.org/drawingml/2006/main">
               <a:ext uri="{FF2B5EF4-FFF2-40B4-BE49-F238E27FC236}">
-                <a16:creationId xmlns:a16="http://schemas.microsoft.com/office/drawing/2014/main" id="{8619BA47-B074-41E7-913E-D4AA419827FB}"/>
+                <a16:creationId xmlns:a16="http://schemas.microsoft.com/office/drawing/2014/main" id="{4CA44062-8E16-435F-A6C2-74058D7E13F6}"/>
               </a:ext>
             </a:extLst>
           </p:cNvPr>
@@ -5383,7 +5383,7 @@
     </p:spTree>
     <p:extLst>
       <p:ext uri="{BB962C8B-B14F-4D97-AF65-F5344CB8AC3E}">
-        <p14:creationId xmlns:p14="http://schemas.microsoft.com/office/powerpoint/2010/main" val="1543582734"/>
+        <p14:creationId xmlns:p14="http://schemas.microsoft.com/office/powerpoint/2010/main" val="1107838738"/>
       </p:ext>
     </p:extLst>
   </p:cSld>
@@ -5584,7 +5584,7 @@
           <p:cNvPr id="23" name="">
             <a:extLst xmlns:a="http://schemas.openxmlformats.org/drawingml/2006/main">
               <a:ext uri="{FF2B5EF4-FFF2-40B4-BE49-F238E27FC236}">
-                <a16:creationId xmlns:a16="http://schemas.microsoft.com/office/drawing/2014/main" id="{106F58FC-23A2-422C-9F4C-5C49C170EBE3}"/>
+                <a16:creationId xmlns:a16="http://schemas.microsoft.com/office/drawing/2014/main" id="{12A0BD5D-423D-4518-8F59-DF169CE05E6B}"/>
               </a:ext>
             </a:extLst>
           </p:cNvPr>
@@ -5616,7 +5616,7 @@
           <p:cNvPr id="2" name="">
             <a:extLst xmlns:a="http://schemas.openxmlformats.org/drawingml/2006/main">
               <a:ext uri="{FF2B5EF4-FFF2-40B4-BE49-F238E27FC236}">
-                <a16:creationId xmlns:a16="http://schemas.microsoft.com/office/drawing/2014/main" id="{437E0CDE-5612-4C83-9C54-74B21A7BB81B}"/>
+                <a16:creationId xmlns:a16="http://schemas.microsoft.com/office/drawing/2014/main" id="{2DFDE2D4-74FF-4F18-B279-907FE4A25EFC}"/>
               </a:ext>
             </a:extLst>
           </p:cNvPr>
@@ -5673,7 +5673,7 @@
           <p:cNvPr id="3" name="">
             <a:extLst xmlns:a="http://schemas.openxmlformats.org/drawingml/2006/main">
               <a:ext uri="{FF2B5EF4-FFF2-40B4-BE49-F238E27FC236}">
-                <a16:creationId xmlns:a16="http://schemas.microsoft.com/office/drawing/2014/main" id="{8309ABD1-0972-47CB-B66E-62420E1E4319}"/>
+                <a16:creationId xmlns:a16="http://schemas.microsoft.com/office/drawing/2014/main" id="{7E497152-0F03-44EF-8131-8ADF8DD099CE}"/>
               </a:ext>
             </a:extLst>
           </p:cNvPr>
@@ -5705,7 +5705,7 @@
           <p:cNvPr id="4" name="">
             <a:extLst xmlns:a="http://schemas.openxmlformats.org/drawingml/2006/main">
               <a:ext uri="{FF2B5EF4-FFF2-40B4-BE49-F238E27FC236}">
-                <a16:creationId xmlns:a16="http://schemas.microsoft.com/office/drawing/2014/main" id="{D17EC757-78B4-4490-AF46-C0BCFCC44FB3}"/>
+                <a16:creationId xmlns:a16="http://schemas.microsoft.com/office/drawing/2014/main" id="{D861F042-C095-43FC-A055-8D6C58F4C8AC}"/>
               </a:ext>
             </a:extLst>
           </p:cNvPr>
@@ -5762,7 +5762,7 @@
           <p:cNvPr id="5" name="">
             <a:extLst xmlns:a="http://schemas.openxmlformats.org/drawingml/2006/main">
               <a:ext uri="{FF2B5EF4-FFF2-40B4-BE49-F238E27FC236}">
-                <a16:creationId xmlns:a16="http://schemas.microsoft.com/office/drawing/2014/main" id="{4F0C22C4-869B-4E29-A77E-36F34AE564CF}"/>
+                <a16:creationId xmlns:a16="http://schemas.microsoft.com/office/drawing/2014/main" id="{9CEC249A-7803-4913-83B8-AACEAB9B0EFC}"/>
               </a:ext>
             </a:extLst>
           </p:cNvPr>
@@ -5819,7 +5819,7 @@
           <p:cNvPr id="6" name="">
             <a:extLst xmlns:a="http://schemas.openxmlformats.org/drawingml/2006/main">
               <a:ext uri="{FF2B5EF4-FFF2-40B4-BE49-F238E27FC236}">
-                <a16:creationId xmlns:a16="http://schemas.microsoft.com/office/drawing/2014/main" id="{C697F3AD-FE3C-4462-A76A-77B9DEF6A288}"/>
+                <a16:creationId xmlns:a16="http://schemas.microsoft.com/office/drawing/2014/main" id="{B19B08D8-744C-468D-A611-64577B0E05C0}"/>
               </a:ext>
             </a:extLst>
           </p:cNvPr>
@@ -5876,7 +5876,7 @@
           <p:cNvPr id="7" name="">
             <a:extLst xmlns:a="http://schemas.openxmlformats.org/drawingml/2006/main">
               <a:ext uri="{FF2B5EF4-FFF2-40B4-BE49-F238E27FC236}">
-                <a16:creationId xmlns:a16="http://schemas.microsoft.com/office/drawing/2014/main" id="{A9CDE772-E61D-4B6C-A51C-0B0A82C9FED3}"/>
+                <a16:creationId xmlns:a16="http://schemas.microsoft.com/office/drawing/2014/main" id="{6B02289F-693E-405C-B4BD-F83E4843561A}"/>
               </a:ext>
             </a:extLst>
           </p:cNvPr>
@@ -5908,7 +5908,7 @@
           <p:cNvPr id="8" name="">
             <a:extLst xmlns:a="http://schemas.openxmlformats.org/drawingml/2006/main">
               <a:ext uri="{FF2B5EF4-FFF2-40B4-BE49-F238E27FC236}">
-                <a16:creationId xmlns:a16="http://schemas.microsoft.com/office/drawing/2014/main" id="{4E0E912A-6110-460C-8137-AA25B0711E2C}"/>
+                <a16:creationId xmlns:a16="http://schemas.microsoft.com/office/drawing/2014/main" id="{32CBFCB1-799E-48AB-B17D-2574A3512895}"/>
               </a:ext>
             </a:extLst>
           </p:cNvPr>
@@ -5965,7 +5965,7 @@
           <p:cNvPr id="9" name="">
             <a:extLst xmlns:a="http://schemas.openxmlformats.org/drawingml/2006/main">
               <a:ext uri="{FF2B5EF4-FFF2-40B4-BE49-F238E27FC236}">
-                <a16:creationId xmlns:a16="http://schemas.microsoft.com/office/drawing/2014/main" id="{538E9408-DCC1-421E-9B80-2269F7539ED2}"/>
+                <a16:creationId xmlns:a16="http://schemas.microsoft.com/office/drawing/2014/main" id="{3A7A67AD-0664-4738-85AC-4A74E655ED4C}"/>
               </a:ext>
             </a:extLst>
           </p:cNvPr>
@@ -6022,7 +6022,7 @@
           <p:cNvPr id="10" name="">
             <a:extLst xmlns:a="http://schemas.openxmlformats.org/drawingml/2006/main">
               <a:ext uri="{FF2B5EF4-FFF2-40B4-BE49-F238E27FC236}">
-                <a16:creationId xmlns:a16="http://schemas.microsoft.com/office/drawing/2014/main" id="{B9F031CF-E082-4B12-AB9C-EE50ED0F0763}"/>
+                <a16:creationId xmlns:a16="http://schemas.microsoft.com/office/drawing/2014/main" id="{9E6D7C4D-D9D3-4D61-96F0-FA746121D57A}"/>
               </a:ext>
             </a:extLst>
           </p:cNvPr>
@@ -6056,7 +6056,7 @@
           <p:cNvPr id="11" name="">
             <a:extLst xmlns:a="http://schemas.openxmlformats.org/drawingml/2006/main">
               <a:ext uri="{FF2B5EF4-FFF2-40B4-BE49-F238E27FC236}">
-                <a16:creationId xmlns:a16="http://schemas.microsoft.com/office/drawing/2014/main" id="{ED9A3B41-636C-4058-BF7E-2D2D9E4C3DBA}"/>
+                <a16:creationId xmlns:a16="http://schemas.microsoft.com/office/drawing/2014/main" id="{C5333523-A631-4A31-90DA-B14348567418}"/>
               </a:ext>
             </a:extLst>
           </p:cNvPr>
@@ -6088,7 +6088,7 @@
           <p:cNvPr id="12" name="">
             <a:extLst xmlns:a="http://schemas.openxmlformats.org/drawingml/2006/main">
               <a:ext uri="{FF2B5EF4-FFF2-40B4-BE49-F238E27FC236}">
-                <a16:creationId xmlns:a16="http://schemas.microsoft.com/office/drawing/2014/main" id="{7BF20000-8564-4EB2-9322-F3E62680770E}"/>
+                <a16:creationId xmlns:a16="http://schemas.microsoft.com/office/drawing/2014/main" id="{4F31AFB2-9700-44AD-AA14-7635EDD18B78}"/>
               </a:ext>
             </a:extLst>
           </p:cNvPr>
@@ -6145,7 +6145,7 @@
           <p:cNvPr id="13" name="">
             <a:extLst xmlns:a="http://schemas.openxmlformats.org/drawingml/2006/main">
               <a:ext uri="{FF2B5EF4-FFF2-40B4-BE49-F238E27FC236}">
-                <a16:creationId xmlns:a16="http://schemas.microsoft.com/office/drawing/2014/main" id="{9EED1A2F-882F-4802-8DD7-52663A5A4F29}"/>
+                <a16:creationId xmlns:a16="http://schemas.microsoft.com/office/drawing/2014/main" id="{B29B8238-0B16-4A98-921A-B8FE062D92A0}"/>
               </a:ext>
             </a:extLst>
           </p:cNvPr>
@@ -6202,7 +6202,7 @@
           <p:cNvPr id="14" name="">
             <a:extLst xmlns:a="http://schemas.openxmlformats.org/drawingml/2006/main">
               <a:ext uri="{FF2B5EF4-FFF2-40B4-BE49-F238E27FC236}">
-                <a16:creationId xmlns:a16="http://schemas.microsoft.com/office/drawing/2014/main" id="{08F1D65E-C2FB-4B3B-AC99-3EF904454A80}"/>
+                <a16:creationId xmlns:a16="http://schemas.microsoft.com/office/drawing/2014/main" id="{74836037-7253-4524-8614-223F64FFEEE9}"/>
               </a:ext>
             </a:extLst>
           </p:cNvPr>
@@ -6236,7 +6236,7 @@
           <p:cNvPr id="15" name="">
             <a:extLst xmlns:a="http://schemas.openxmlformats.org/drawingml/2006/main">
               <a:ext uri="{FF2B5EF4-FFF2-40B4-BE49-F238E27FC236}">
-                <a16:creationId xmlns:a16="http://schemas.microsoft.com/office/drawing/2014/main" id="{BBF76140-D0E7-48F5-9DAA-6587FEAD379B}"/>
+                <a16:creationId xmlns:a16="http://schemas.microsoft.com/office/drawing/2014/main" id="{242AD3DB-6D25-49EB-8247-BC6B17C1567E}"/>
               </a:ext>
             </a:extLst>
           </p:cNvPr>
@@ -6268,7 +6268,7 @@
           <p:cNvPr id="16" name="">
             <a:extLst xmlns:a="http://schemas.openxmlformats.org/drawingml/2006/main">
               <a:ext uri="{FF2B5EF4-FFF2-40B4-BE49-F238E27FC236}">
-                <a16:creationId xmlns:a16="http://schemas.microsoft.com/office/drawing/2014/main" id="{89DC033D-A496-4C37-889D-50039491E2DE}"/>
+                <a16:creationId xmlns:a16="http://schemas.microsoft.com/office/drawing/2014/main" id="{D6F8901C-4981-4B7F-8163-042F97D1F043}"/>
               </a:ext>
             </a:extLst>
           </p:cNvPr>
@@ -6325,7 +6325,7 @@
           <p:cNvPr id="17" name="">
             <a:extLst xmlns:a="http://schemas.openxmlformats.org/drawingml/2006/main">
               <a:ext uri="{FF2B5EF4-FFF2-40B4-BE49-F238E27FC236}">
-                <a16:creationId xmlns:a16="http://schemas.microsoft.com/office/drawing/2014/main" id="{D816A9CA-0BAB-43CC-9B39-2E302FE278D5}"/>
+                <a16:creationId xmlns:a16="http://schemas.microsoft.com/office/drawing/2014/main" id="{3B4A1769-401A-4374-9B47-CD1A75D9B84B}"/>
               </a:ext>
             </a:extLst>
           </p:cNvPr>
@@ -6382,7 +6382,7 @@
           <p:cNvPr id="18" name="">
             <a:extLst xmlns:a="http://schemas.openxmlformats.org/drawingml/2006/main">
               <a:ext uri="{FF2B5EF4-FFF2-40B4-BE49-F238E27FC236}">
-                <a16:creationId xmlns:a16="http://schemas.microsoft.com/office/drawing/2014/main" id="{71AB7A7D-5EB8-42B4-81D8-8F4ACD00DF09}"/>
+                <a16:creationId xmlns:a16="http://schemas.microsoft.com/office/drawing/2014/main" id="{3B412C6E-BB30-4712-BBE2-E9E8C4426068}"/>
               </a:ext>
             </a:extLst>
           </p:cNvPr>
@@ -6416,7 +6416,7 @@
           <p:cNvPr id="19" name="">
             <a:extLst xmlns:a="http://schemas.openxmlformats.org/drawingml/2006/main">
               <a:ext uri="{FF2B5EF4-FFF2-40B4-BE49-F238E27FC236}">
-                <a16:creationId xmlns:a16="http://schemas.microsoft.com/office/drawing/2014/main" id="{AAE395FE-FF2E-4782-B3F0-000A40C214C9}"/>
+                <a16:creationId xmlns:a16="http://schemas.microsoft.com/office/drawing/2014/main" id="{A3FFCC47-2A8A-4152-9F79-3B90F10FA5FA}"/>
               </a:ext>
             </a:extLst>
           </p:cNvPr>
@@ -6448,7 +6448,7 @@
           <p:cNvPr id="20" name="">
             <a:extLst xmlns:a="http://schemas.openxmlformats.org/drawingml/2006/main">
               <a:ext uri="{FF2B5EF4-FFF2-40B4-BE49-F238E27FC236}">
-                <a16:creationId xmlns:a16="http://schemas.microsoft.com/office/drawing/2014/main" id="{047D039A-2D90-4B10-A470-077AD0B6555C}"/>
+                <a16:creationId xmlns:a16="http://schemas.microsoft.com/office/drawing/2014/main" id="{D037C163-C9CF-41FB-8F54-79AFA66C36FD}"/>
               </a:ext>
             </a:extLst>
           </p:cNvPr>
@@ -6505,7 +6505,7 @@
           <p:cNvPr id="21" name="">
             <a:extLst xmlns:a="http://schemas.openxmlformats.org/drawingml/2006/main">
               <a:ext uri="{FF2B5EF4-FFF2-40B4-BE49-F238E27FC236}">
-                <a16:creationId xmlns:a16="http://schemas.microsoft.com/office/drawing/2014/main" id="{1909ACB7-25BD-4C73-9CA0-455313FDB538}"/>
+                <a16:creationId xmlns:a16="http://schemas.microsoft.com/office/drawing/2014/main" id="{AB3A31AA-8ABC-410E-856F-EB37CE3EEBF9}"/>
               </a:ext>
             </a:extLst>
           </p:cNvPr>
@@ -6562,7 +6562,7 @@
           <p:cNvPr id="22" name="">
             <a:extLst xmlns:a="http://schemas.openxmlformats.org/drawingml/2006/main">
               <a:ext uri="{FF2B5EF4-FFF2-40B4-BE49-F238E27FC236}">
-                <a16:creationId xmlns:a16="http://schemas.microsoft.com/office/drawing/2014/main" id="{8866141B-C15C-4D04-A4D4-3737616CB518}"/>
+                <a16:creationId xmlns:a16="http://schemas.microsoft.com/office/drawing/2014/main" id="{090ACDBC-E785-4759-9720-F1400F093FDE}"/>
               </a:ext>
             </a:extLst>
           </p:cNvPr>
@@ -6617,7 +6617,7 @@
     </p:spTree>
     <p:extLst>
       <p:ext uri="{BB962C8B-B14F-4D97-AF65-F5344CB8AC3E}">
-        <p14:creationId xmlns:p14="http://schemas.microsoft.com/office/powerpoint/2010/main" val="164128190"/>
+        <p14:creationId xmlns:p14="http://schemas.microsoft.com/office/powerpoint/2010/main" val="1041722142"/>
       </p:ext>
     </p:extLst>
   </p:cSld>
@@ -6818,7 +6818,7 @@
           <p:cNvPr id="16" name="">
             <a:extLst xmlns:a="http://schemas.openxmlformats.org/drawingml/2006/main">
               <a:ext uri="{FF2B5EF4-FFF2-40B4-BE49-F238E27FC236}">
-                <a16:creationId xmlns:a16="http://schemas.microsoft.com/office/drawing/2014/main" id="{0AC90424-0E59-43F9-AC4F-0BBF41828CC4}"/>
+                <a16:creationId xmlns:a16="http://schemas.microsoft.com/office/drawing/2014/main" id="{EDCFB95B-BBB3-4455-929D-D6C6ACC2FF61}"/>
               </a:ext>
             </a:extLst>
           </p:cNvPr>
@@ -6850,7 +6850,7 @@
           <p:cNvPr id="2" name="">
             <a:extLst xmlns:a="http://schemas.openxmlformats.org/drawingml/2006/main">
               <a:ext uri="{FF2B5EF4-FFF2-40B4-BE49-F238E27FC236}">
-                <a16:creationId xmlns:a16="http://schemas.microsoft.com/office/drawing/2014/main" id="{6DC64272-CE1C-4327-A224-EEE0AED375E9}"/>
+                <a16:creationId xmlns:a16="http://schemas.microsoft.com/office/drawing/2014/main" id="{55459C9D-52FC-435F-A65A-105FF18071E9}"/>
               </a:ext>
             </a:extLst>
           </p:cNvPr>
@@ -6907,7 +6907,7 @@
           <p:cNvPr id="3" name="">
             <a:extLst xmlns:a="http://schemas.openxmlformats.org/drawingml/2006/main">
               <a:ext uri="{FF2B5EF4-FFF2-40B4-BE49-F238E27FC236}">
-                <a16:creationId xmlns:a16="http://schemas.microsoft.com/office/drawing/2014/main" id="{2A422ABE-58BF-47E9-9F5A-52B5AE614CA2}"/>
+                <a16:creationId xmlns:a16="http://schemas.microsoft.com/office/drawing/2014/main" id="{2CC6BE9B-6485-4AA8-9110-6CAB514CC840}"/>
               </a:ext>
             </a:extLst>
           </p:cNvPr>
@@ -6939,7 +6939,7 @@
           <p:cNvPr id="4" name="">
             <a:extLst xmlns:a="http://schemas.openxmlformats.org/drawingml/2006/main">
               <a:ext uri="{FF2B5EF4-FFF2-40B4-BE49-F238E27FC236}">
-                <a16:creationId xmlns:a16="http://schemas.microsoft.com/office/drawing/2014/main" id="{A29D67FC-CA93-4467-B4A0-593B00E237C5}"/>
+                <a16:creationId xmlns:a16="http://schemas.microsoft.com/office/drawing/2014/main" id="{1E13E264-46D5-4EDC-BA71-765C4F868415}"/>
               </a:ext>
             </a:extLst>
           </p:cNvPr>
@@ -6996,7 +6996,7 @@
           <p:cNvPr id="5" name="">
             <a:extLst xmlns:a="http://schemas.openxmlformats.org/drawingml/2006/main">
               <a:ext uri="{FF2B5EF4-FFF2-40B4-BE49-F238E27FC236}">
-                <a16:creationId xmlns:a16="http://schemas.microsoft.com/office/drawing/2014/main" id="{61F34346-E2E4-42B7-900F-CDCFA2993A95}"/>
+                <a16:creationId xmlns:a16="http://schemas.microsoft.com/office/drawing/2014/main" id="{C87F639E-F14D-4FC7-8506-F5F4B3C8F943}"/>
               </a:ext>
             </a:extLst>
           </p:cNvPr>
@@ -7053,7 +7053,7 @@
           <p:cNvPr id="6" name="">
             <a:extLst xmlns:a="http://schemas.openxmlformats.org/drawingml/2006/main">
               <a:ext uri="{FF2B5EF4-FFF2-40B4-BE49-F238E27FC236}">
-                <a16:creationId xmlns:a16="http://schemas.microsoft.com/office/drawing/2014/main" id="{948B8444-3FB9-47F6-8369-61A0C681376C}"/>
+                <a16:creationId xmlns:a16="http://schemas.microsoft.com/office/drawing/2014/main" id="{9F5FCEAE-CA9E-4E2F-BFDD-6751FD52B107}"/>
               </a:ext>
             </a:extLst>
           </p:cNvPr>
@@ -7110,7 +7110,7 @@
           <p:cNvPr id="7" name="">
             <a:extLst xmlns:a="http://schemas.openxmlformats.org/drawingml/2006/main">
               <a:ext uri="{FF2B5EF4-FFF2-40B4-BE49-F238E27FC236}">
-                <a16:creationId xmlns:a16="http://schemas.microsoft.com/office/drawing/2014/main" id="{8800F105-F420-450B-A5EB-262CEA7ACA50}"/>
+                <a16:creationId xmlns:a16="http://schemas.microsoft.com/office/drawing/2014/main" id="{B4395837-6F5E-460B-BE64-CC5B7C1D8BC3}"/>
               </a:ext>
             </a:extLst>
           </p:cNvPr>
@@ -7142,7 +7142,7 @@
           <p:cNvPr id="8" name="">
             <a:extLst xmlns:a="http://schemas.openxmlformats.org/drawingml/2006/main">
               <a:ext uri="{FF2B5EF4-FFF2-40B4-BE49-F238E27FC236}">
-                <a16:creationId xmlns:a16="http://schemas.microsoft.com/office/drawing/2014/main" id="{D7B3BBA8-9100-46AC-BDC0-F281C87A4B18}"/>
+                <a16:creationId xmlns:a16="http://schemas.microsoft.com/office/drawing/2014/main" id="{267BCA2B-BE34-4957-B33A-7D98807FCF02}"/>
               </a:ext>
             </a:extLst>
           </p:cNvPr>
@@ -7199,7 +7199,7 @@
           <p:cNvPr id="9" name="">
             <a:extLst xmlns:a="http://schemas.openxmlformats.org/drawingml/2006/main">
               <a:ext uri="{FF2B5EF4-FFF2-40B4-BE49-F238E27FC236}">
-                <a16:creationId xmlns:a16="http://schemas.microsoft.com/office/drawing/2014/main" id="{63398C36-A120-487E-A73B-47AED0501D73}"/>
+                <a16:creationId xmlns:a16="http://schemas.microsoft.com/office/drawing/2014/main" id="{92870B83-8708-41D0-83F3-27B4E05C7B00}"/>
               </a:ext>
             </a:extLst>
           </p:cNvPr>
@@ -7256,7 +7256,7 @@
           <p:cNvPr id="10" name="">
             <a:extLst xmlns:a="http://schemas.openxmlformats.org/drawingml/2006/main">
               <a:ext uri="{FF2B5EF4-FFF2-40B4-BE49-F238E27FC236}">
-                <a16:creationId xmlns:a16="http://schemas.microsoft.com/office/drawing/2014/main" id="{0C9AFF64-462C-471A-96E5-9BD0E07700B0}"/>
+                <a16:creationId xmlns:a16="http://schemas.microsoft.com/office/drawing/2014/main" id="{9AB20D40-E9BB-4F0C-8371-3AFA3FCC0C24}"/>
               </a:ext>
             </a:extLst>
           </p:cNvPr>
@@ -7313,7 +7313,7 @@
           <p:cNvPr id="11" name="">
             <a:extLst xmlns:a="http://schemas.openxmlformats.org/drawingml/2006/main">
               <a:ext uri="{FF2B5EF4-FFF2-40B4-BE49-F238E27FC236}">
-                <a16:creationId xmlns:a16="http://schemas.microsoft.com/office/drawing/2014/main" id="{17F6E5BC-04DD-4BD3-805D-5873E65CB263}"/>
+                <a16:creationId xmlns:a16="http://schemas.microsoft.com/office/drawing/2014/main" id="{65977FBC-0B45-4392-BC76-74273A4E1AA0}"/>
               </a:ext>
             </a:extLst>
           </p:cNvPr>
@@ -7345,7 +7345,7 @@
           <p:cNvPr id="12" name="">
             <a:extLst xmlns:a="http://schemas.openxmlformats.org/drawingml/2006/main">
               <a:ext uri="{FF2B5EF4-FFF2-40B4-BE49-F238E27FC236}">
-                <a16:creationId xmlns:a16="http://schemas.microsoft.com/office/drawing/2014/main" id="{9B50B369-5EEA-4268-9BE3-B7FFEE832DF1}"/>
+                <a16:creationId xmlns:a16="http://schemas.microsoft.com/office/drawing/2014/main" id="{EF4F6860-BBEC-4AE1-9C89-EF7A6BD3366E}"/>
               </a:ext>
             </a:extLst>
           </p:cNvPr>
@@ -7402,7 +7402,7 @@
           <p:cNvPr id="13" name="">
             <a:extLst xmlns:a="http://schemas.openxmlformats.org/drawingml/2006/main">
               <a:ext uri="{FF2B5EF4-FFF2-40B4-BE49-F238E27FC236}">
-                <a16:creationId xmlns:a16="http://schemas.microsoft.com/office/drawing/2014/main" id="{2B6DAD50-FD5A-48D7-B3EF-2B3DC70B1B6E}"/>
+                <a16:creationId xmlns:a16="http://schemas.microsoft.com/office/drawing/2014/main" id="{FB4BA7AF-FF27-422C-9BC8-B3BEFDC5087E}"/>
               </a:ext>
             </a:extLst>
           </p:cNvPr>
@@ -7459,7 +7459,7 @@
           <p:cNvPr id="14" name="">
             <a:extLst xmlns:a="http://schemas.openxmlformats.org/drawingml/2006/main">
               <a:ext uri="{FF2B5EF4-FFF2-40B4-BE49-F238E27FC236}">
-                <a16:creationId xmlns:a16="http://schemas.microsoft.com/office/drawing/2014/main" id="{09A4EBD2-E5EA-4567-8E74-D56BE0AEC614}"/>
+                <a16:creationId xmlns:a16="http://schemas.microsoft.com/office/drawing/2014/main" id="{D25C73D4-2C39-4ABA-A515-A0F370109E10}"/>
               </a:ext>
             </a:extLst>
           </p:cNvPr>
@@ -7516,7 +7516,7 @@
           <p:cNvPr id="15" name="">
             <a:extLst xmlns:a="http://schemas.openxmlformats.org/drawingml/2006/main">
               <a:ext uri="{FF2B5EF4-FFF2-40B4-BE49-F238E27FC236}">
-                <a16:creationId xmlns:a16="http://schemas.microsoft.com/office/drawing/2014/main" id="{78B556D9-24C1-44A5-B298-3A3D27E5FAD2}"/>
+                <a16:creationId xmlns:a16="http://schemas.microsoft.com/office/drawing/2014/main" id="{204ED3F2-D992-4A5B-8614-1AB05172D945}"/>
               </a:ext>
             </a:extLst>
           </p:cNvPr>
@@ -7571,7 +7571,7 @@
     </p:spTree>
     <p:extLst>
       <p:ext uri="{BB962C8B-B14F-4D97-AF65-F5344CB8AC3E}">
-        <p14:creationId xmlns:p14="http://schemas.microsoft.com/office/powerpoint/2010/main" val="542304729"/>
+        <p14:creationId xmlns:p14="http://schemas.microsoft.com/office/powerpoint/2010/main" val="1234211868"/>
       </p:ext>
     </p:extLst>
   </p:cSld>
@@ -7769,10 +7769,10 @@
       </p:grpSpPr>
       <p:sp>
         <p:nvSpPr>
-          <p:cNvPr id="23" name="">
-            <a:extLst xmlns:a="http://schemas.openxmlformats.org/drawingml/2006/main">
-              <a:ext uri="{FF2B5EF4-FFF2-40B4-BE49-F238E27FC236}">
-                <a16:creationId xmlns:a16="http://schemas.microsoft.com/office/drawing/2014/main" id="{03DF7AB5-E198-409C-A502-B7C529FDE0F9}"/>
+          <p:cNvPr id="26" name="">
+            <a:extLst xmlns:a="http://schemas.openxmlformats.org/drawingml/2006/main">
+              <a:ext uri="{FF2B5EF4-FFF2-40B4-BE49-F238E27FC236}">
+                <a16:creationId xmlns:a16="http://schemas.microsoft.com/office/drawing/2014/main" id="{908A454C-10BD-45F6-8E5B-134793026346}"/>
               </a:ext>
             </a:extLst>
           </p:cNvPr>
@@ -7804,7 +7804,7 @@
           <p:cNvPr id="2" name="">
             <a:extLst xmlns:a="http://schemas.openxmlformats.org/drawingml/2006/main">
               <a:ext uri="{FF2B5EF4-FFF2-40B4-BE49-F238E27FC236}">
-                <a16:creationId xmlns:a16="http://schemas.microsoft.com/office/drawing/2014/main" id="{09641708-36C4-4D42-8798-BD9D6CAD87D7}"/>
+                <a16:creationId xmlns:a16="http://schemas.microsoft.com/office/drawing/2014/main" id="{C121A648-F043-445D-85FF-D1D223F877AB}"/>
               </a:ext>
             </a:extLst>
           </p:cNvPr>
@@ -7861,7 +7861,7 @@
           <p:cNvPr id="3" name="">
             <a:extLst xmlns:a="http://schemas.openxmlformats.org/drawingml/2006/main">
               <a:ext uri="{FF2B5EF4-FFF2-40B4-BE49-F238E27FC236}">
-                <a16:creationId xmlns:a16="http://schemas.microsoft.com/office/drawing/2014/main" id="{BFDB00C9-D1B7-4EC8-9914-BC841B06FB9A}"/>
+                <a16:creationId xmlns:a16="http://schemas.microsoft.com/office/drawing/2014/main" id="{BE9925FD-4BE6-45DB-98CC-522B9E6FA431}"/>
               </a:ext>
             </a:extLst>
           </p:cNvPr>
@@ -7893,7 +7893,7 @@
           <p:cNvPr id="4" name="">
             <a:extLst xmlns:a="http://schemas.openxmlformats.org/drawingml/2006/main">
               <a:ext uri="{FF2B5EF4-FFF2-40B4-BE49-F238E27FC236}">
-                <a16:creationId xmlns:a16="http://schemas.microsoft.com/office/drawing/2014/main" id="{F9C3902A-3731-4143-87C3-0A2E4C67E6FD}"/>
+                <a16:creationId xmlns:a16="http://schemas.microsoft.com/office/drawing/2014/main" id="{FFAB022D-502A-4E69-8D85-AF86F342A377}"/>
               </a:ext>
             </a:extLst>
           </p:cNvPr>
@@ -7950,7 +7950,7 @@
           <p:cNvPr id="5" name="">
             <a:extLst xmlns:a="http://schemas.openxmlformats.org/drawingml/2006/main">
               <a:ext uri="{FF2B5EF4-FFF2-40B4-BE49-F238E27FC236}">
-                <a16:creationId xmlns:a16="http://schemas.microsoft.com/office/drawing/2014/main" id="{0D0520D0-6CE8-422F-92A5-5A594252CDD0}"/>
+                <a16:creationId xmlns:a16="http://schemas.microsoft.com/office/drawing/2014/main" id="{CBFF852B-7168-4CEC-8B11-988F13CEA7E8}"/>
               </a:ext>
             </a:extLst>
           </p:cNvPr>
@@ -8007,7 +8007,7 @@
           <p:cNvPr id="6" name="">
             <a:extLst xmlns:a="http://schemas.openxmlformats.org/drawingml/2006/main">
               <a:ext uri="{FF2B5EF4-FFF2-40B4-BE49-F238E27FC236}">
-                <a16:creationId xmlns:a16="http://schemas.microsoft.com/office/drawing/2014/main" id="{7F931B44-8118-4286-9C6B-32FF496C5CA6}"/>
+                <a16:creationId xmlns:a16="http://schemas.microsoft.com/office/drawing/2014/main" id="{30EE4137-21C1-4F2A-A808-E76FAC4038DC}"/>
               </a:ext>
             </a:extLst>
           </p:cNvPr>
@@ -8064,7 +8064,7 @@
           <p:cNvPr id="7" name="">
             <a:extLst xmlns:a="http://schemas.openxmlformats.org/drawingml/2006/main">
               <a:ext uri="{FF2B5EF4-FFF2-40B4-BE49-F238E27FC236}">
-                <a16:creationId xmlns:a16="http://schemas.microsoft.com/office/drawing/2014/main" id="{18CAFC5F-283C-483D-87D5-00A64662E7AA}"/>
+                <a16:creationId xmlns:a16="http://schemas.microsoft.com/office/drawing/2014/main" id="{85CD51CA-07AB-4EBC-93FB-51BEE789918F}"/>
               </a:ext>
             </a:extLst>
           </p:cNvPr>
@@ -8096,7 +8096,7 @@
           <p:cNvPr id="8" name="">
             <a:extLst xmlns:a="http://schemas.openxmlformats.org/drawingml/2006/main">
               <a:ext uri="{FF2B5EF4-FFF2-40B4-BE49-F238E27FC236}">
-                <a16:creationId xmlns:a16="http://schemas.microsoft.com/office/drawing/2014/main" id="{15B91578-EC40-4F90-AB3E-F0A16E44E22E}"/>
+                <a16:creationId xmlns:a16="http://schemas.microsoft.com/office/drawing/2014/main" id="{8FAFF824-BDF1-42FA-861B-1A18D6D6B3EE}"/>
               </a:ext>
             </a:extLst>
           </p:cNvPr>
@@ -8153,7 +8153,7 @@
           <p:cNvPr id="9" name="">
             <a:extLst xmlns:a="http://schemas.openxmlformats.org/drawingml/2006/main">
               <a:ext uri="{FF2B5EF4-FFF2-40B4-BE49-F238E27FC236}">
-                <a16:creationId xmlns:a16="http://schemas.microsoft.com/office/drawing/2014/main" id="{EF451E78-155C-4167-81EF-2057A003D842}"/>
+                <a16:creationId xmlns:a16="http://schemas.microsoft.com/office/drawing/2014/main" id="{6E1DCADA-FBEF-4522-AEBB-82D724801D4E}"/>
               </a:ext>
             </a:extLst>
           </p:cNvPr>
@@ -8210,19 +8210,19 @@
           <p:cNvPr id="10" name="">
             <a:extLst xmlns:a="http://schemas.openxmlformats.org/drawingml/2006/main">
               <a:ext uri="{FF2B5EF4-FFF2-40B4-BE49-F238E27FC236}">
-                <a16:creationId xmlns:a16="http://schemas.microsoft.com/office/drawing/2014/main" id="{0F9056A3-CBEB-440C-93BB-A683EDE43345}"/>
-              </a:ext>
-            </a:extLst>
-          </p:cNvPr>
-          <p:cNvSpPr>
-            <a:spLocks xmlns:a="http://schemas.openxmlformats.org/drawingml/2006/main" noGrp="1"/>
-          </p:cNvSpPr>
-          <p:nvPr/>
-        </p:nvSpPr>
-        <p:spPr>
-          <a:xfrm xmlns:a="http://schemas.openxmlformats.org/drawingml/2006/main">
-            <a:off x="914400" y="1257300"/>
-            <a:ext cx="10363200" cy="781050"/>
+                <a16:creationId xmlns:a16="http://schemas.microsoft.com/office/drawing/2014/main" id="{0B9E3439-6CA6-4095-87B8-6ACB05664D10}"/>
+              </a:ext>
+            </a:extLst>
+          </p:cNvPr>
+          <p:cNvSpPr>
+            <a:spLocks xmlns:a="http://schemas.openxmlformats.org/drawingml/2006/main" noGrp="1"/>
+          </p:cNvSpPr>
+          <p:nvPr/>
+        </p:nvSpPr>
+        <p:spPr>
+          <a:xfrm xmlns:a="http://schemas.openxmlformats.org/drawingml/2006/main">
+            <a:off x="857250" y="1219200"/>
+            <a:ext cx="10477500" cy="742950"/>
           </a:xfrm>
           <a:prstGeom xmlns:a="http://schemas.openxmlformats.org/drawingml/2006/main" prst="rect">
             <a:avLst/>
@@ -8239,7 +8239,7 @@
           <a:lstStyle xmlns:a="http://schemas.openxmlformats.org/drawingml/2006/main"/>
           <a:p xmlns:a="http://schemas.openxmlformats.org/drawingml/2006/main">
             <a:pPr algn="ctr">
-              <a:defRPr sz="2175" b="1">
+              <a:defRPr sz="2100" b="1">
                 <a:solidFill>
                   <a:srgbClr val="17253A"/>
                 </a:solidFill>
@@ -8249,7 +8249,7 @@
               </a:defRPr>
             </a:pPr>
             <a:r>
-              <a:rPr sz="2175" b="1">
+              <a:rPr sz="2100" b="1">
                 <a:solidFill>
                   <a:srgbClr val="17253A"/>
                 </a:solidFill>
@@ -8267,28 +8267,30 @@
           <p:cNvPr id="11" name="">
             <a:extLst xmlns:a="http://schemas.openxmlformats.org/drawingml/2006/main">
               <a:ext uri="{FF2B5EF4-FFF2-40B4-BE49-F238E27FC236}">
-                <a16:creationId xmlns:a16="http://schemas.microsoft.com/office/drawing/2014/main" id="{17A79AAB-E723-4C98-847D-E23E8BA6F9F4}"/>
-              </a:ext>
-            </a:extLst>
-          </p:cNvPr>
-          <p:cNvSpPr>
-            <a:spLocks xmlns:a="http://schemas.openxmlformats.org/drawingml/2006/main" noGrp="1"/>
-          </p:cNvSpPr>
-          <p:nvPr/>
-        </p:nvSpPr>
-        <p:spPr>
-          <a:xfrm xmlns:a="http://schemas.openxmlformats.org/drawingml/2006/main">
-            <a:off x="1000125" y="2247900"/>
-            <a:ext cx="476250" cy="476250"/>
-          </a:xfrm>
-          <a:prstGeom xmlns:a="http://schemas.openxmlformats.org/drawingml/2006/main" prst="ellipse">
+                <a16:creationId xmlns:a16="http://schemas.microsoft.com/office/drawing/2014/main" id="{1E2C6ADC-9201-48CB-B561-61C697EDFA21}"/>
+              </a:ext>
+            </a:extLst>
+          </p:cNvPr>
+          <p:cNvSpPr>
+            <a:spLocks xmlns:a="http://schemas.openxmlformats.org/drawingml/2006/main" noGrp="1"/>
+          </p:cNvSpPr>
+          <p:nvPr/>
+        </p:nvSpPr>
+        <p:spPr>
+          <a:xfrm xmlns:a="http://schemas.openxmlformats.org/drawingml/2006/main">
+            <a:off x="971550" y="2124075"/>
+            <a:ext cx="38100" cy="3524250"/>
+          </a:xfrm>
+          <a:prstGeom xmlns:a="http://schemas.openxmlformats.org/drawingml/2006/main" prst="rect">
             <a:avLst/>
           </a:prstGeom>
           <a:solidFill xmlns:a="http://schemas.openxmlformats.org/drawingml/2006/main">
-            <a:srgbClr val="18324A"/>
+            <a:srgbClr val="2C6E73"/>
           </a:solidFill>
           <a:ln xmlns:a="http://schemas.openxmlformats.org/drawingml/2006/main" w="0">
-            <a:noFill/>
+            <a:solidFill>
+              <a:srgbClr val="2C6E73"/>
+            </a:solidFill>
           </a:ln>
         </p:spPr>
       </p:sp>
@@ -8297,19 +8299,19 @@
           <p:cNvPr id="12" name="">
             <a:extLst xmlns:a="http://schemas.openxmlformats.org/drawingml/2006/main">
               <a:ext uri="{FF2B5EF4-FFF2-40B4-BE49-F238E27FC236}">
-                <a16:creationId xmlns:a16="http://schemas.microsoft.com/office/drawing/2014/main" id="{49BF1C80-31F2-49F6-B30C-AD7856BD4ABB}"/>
-              </a:ext>
-            </a:extLst>
-          </p:cNvPr>
-          <p:cNvSpPr>
-            <a:spLocks xmlns:a="http://schemas.openxmlformats.org/drawingml/2006/main" noGrp="1"/>
-          </p:cNvSpPr>
-          <p:nvPr/>
-        </p:nvSpPr>
-        <p:spPr>
-          <a:xfrm xmlns:a="http://schemas.openxmlformats.org/drawingml/2006/main">
-            <a:off x="1000125" y="2276475"/>
-            <a:ext cx="476250" cy="419100"/>
+                <a16:creationId xmlns:a16="http://schemas.microsoft.com/office/drawing/2014/main" id="{DA22A8C0-7435-43C6-AF26-7B0BEB2BE0D8}"/>
+              </a:ext>
+            </a:extLst>
+          </p:cNvPr>
+          <p:cNvSpPr>
+            <a:spLocks xmlns:a="http://schemas.openxmlformats.org/drawingml/2006/main" noGrp="1"/>
+          </p:cNvSpPr>
+          <p:nvPr/>
+        </p:nvSpPr>
+        <p:spPr>
+          <a:xfrm xmlns:a="http://schemas.openxmlformats.org/drawingml/2006/main">
+            <a:off x="1162050" y="2200275"/>
+            <a:ext cx="400050" cy="400050"/>
           </a:xfrm>
           <a:prstGeom xmlns:a="http://schemas.openxmlformats.org/drawingml/2006/main" prst="rect">
             <a:avLst/>
@@ -8326,9 +8328,9 @@
           <a:lstStyle xmlns:a="http://schemas.openxmlformats.org/drawingml/2006/main"/>
           <a:p xmlns:a="http://schemas.openxmlformats.org/drawingml/2006/main">
             <a:pPr algn="ctr">
-              <a:defRPr sz="1350" b="1">
-                <a:solidFill>
-                  <a:srgbClr val="FFFFFF"/>
+              <a:defRPr sz="1125" b="1">
+                <a:solidFill>
+                  <a:srgbClr val="2C6E73"/>
                 </a:solidFill>
                 <a:latin typeface="Arial"/>
                 <a:ea typeface="Arial"/>
@@ -8336,9 +8338,9 @@
               </a:defRPr>
             </a:pPr>
             <a:r>
-              <a:rPr sz="1350" b="1">
-                <a:solidFill>
-                  <a:srgbClr val="FFFFFF"/>
+              <a:rPr sz="1125" b="1">
+                <a:solidFill>
+                  <a:srgbClr val="2C6E73"/>
                 </a:solidFill>
                 <a:latin typeface="Arial"/>
                 <a:ea typeface="Arial"/>
@@ -8354,19 +8356,19 @@
           <p:cNvPr id="13" name="">
             <a:extLst xmlns:a="http://schemas.openxmlformats.org/drawingml/2006/main">
               <a:ext uri="{FF2B5EF4-FFF2-40B4-BE49-F238E27FC236}">
-                <a16:creationId xmlns:a16="http://schemas.microsoft.com/office/drawing/2014/main" id="{47ACC542-6323-4093-B8F0-AEF1FF595ACE}"/>
-              </a:ext>
-            </a:extLst>
-          </p:cNvPr>
-          <p:cNvSpPr>
-            <a:spLocks xmlns:a="http://schemas.openxmlformats.org/drawingml/2006/main" noGrp="1"/>
-          </p:cNvSpPr>
-          <p:nvPr/>
-        </p:nvSpPr>
-        <p:spPr>
-          <a:xfrm xmlns:a="http://schemas.openxmlformats.org/drawingml/2006/main">
-            <a:off x="1714500" y="2181225"/>
-            <a:ext cx="9429750" cy="609600"/>
+                <a16:creationId xmlns:a16="http://schemas.microsoft.com/office/drawing/2014/main" id="{BDD5F029-C54A-450F-858B-03350AC4EE8F}"/>
+              </a:ext>
+            </a:extLst>
+          </p:cNvPr>
+          <p:cNvSpPr>
+            <a:spLocks xmlns:a="http://schemas.openxmlformats.org/drawingml/2006/main" noGrp="1"/>
+          </p:cNvSpPr>
+          <p:nvPr/>
+        </p:nvSpPr>
+        <p:spPr>
+          <a:xfrm xmlns:a="http://schemas.openxmlformats.org/drawingml/2006/main">
+            <a:off x="1714500" y="2114550"/>
+            <a:ext cx="9525000" cy="638175"/>
           </a:xfrm>
           <a:prstGeom xmlns:a="http://schemas.openxmlformats.org/drawingml/2006/main" prst="rect">
             <a:avLst/>
@@ -8383,7 +8385,7 @@
           <a:lstStyle xmlns:a="http://schemas.openxmlformats.org/drawingml/2006/main"/>
           <a:p xmlns:a="http://schemas.openxmlformats.org/drawingml/2006/main">
             <a:pPr algn="l">
-              <a:defRPr sz="1500" b="0">
+              <a:defRPr sz="1575" b="0">
                 <a:solidFill>
                   <a:srgbClr val="17253A"/>
                 </a:solidFill>
@@ -8393,7 +8395,7 @@
               </a:defRPr>
             </a:pPr>
             <a:r>
-              <a:rPr sz="1500" b="0">
+              <a:rPr sz="1575" b="0">
                 <a:solidFill>
                   <a:srgbClr val="17253A"/>
                 </a:solidFill>
@@ -8401,7 +8403,7 @@
                 <a:ea typeface="Arial"/>
                 <a:cs typeface="Arial"/>
               </a:rPr>
-              <a:t>Identify the structure: Find a common denominator before combining fractions.</a:t>
+              <a:t>5 1/4 - 2 2/3</a:t>
             </a:r>
           </a:p>
         </p:txBody>
@@ -8411,28 +8413,30 @@
           <p:cNvPr id="14" name="">
             <a:extLst xmlns:a="http://schemas.openxmlformats.org/drawingml/2006/main">
               <a:ext uri="{FF2B5EF4-FFF2-40B4-BE49-F238E27FC236}">
-                <a16:creationId xmlns:a16="http://schemas.microsoft.com/office/drawing/2014/main" id="{B792F11B-AF22-40E7-BDFC-8B251FDAD454}"/>
-              </a:ext>
-            </a:extLst>
-          </p:cNvPr>
-          <p:cNvSpPr>
-            <a:spLocks xmlns:a="http://schemas.openxmlformats.org/drawingml/2006/main" noGrp="1"/>
-          </p:cNvSpPr>
-          <p:nvPr/>
-        </p:nvSpPr>
-        <p:spPr>
-          <a:xfrm xmlns:a="http://schemas.openxmlformats.org/drawingml/2006/main">
-            <a:off x="1000125" y="2990850"/>
-            <a:ext cx="476250" cy="476250"/>
-          </a:xfrm>
-          <a:prstGeom xmlns:a="http://schemas.openxmlformats.org/drawingml/2006/main" prst="ellipse">
+                <a16:creationId xmlns:a16="http://schemas.microsoft.com/office/drawing/2014/main" id="{C82C31F4-49F3-476E-88BB-503A3268193C}"/>
+              </a:ext>
+            </a:extLst>
+          </p:cNvPr>
+          <p:cNvSpPr>
+            <a:spLocks xmlns:a="http://schemas.openxmlformats.org/drawingml/2006/main" noGrp="1"/>
+          </p:cNvSpPr>
+          <p:nvPr/>
+        </p:nvSpPr>
+        <p:spPr>
+          <a:xfrm xmlns:a="http://schemas.openxmlformats.org/drawingml/2006/main">
+            <a:off x="1714500" y="2771775"/>
+            <a:ext cx="9334500" cy="9525"/>
+          </a:xfrm>
+          <a:prstGeom xmlns:a="http://schemas.openxmlformats.org/drawingml/2006/main" prst="rect">
             <a:avLst/>
           </a:prstGeom>
           <a:solidFill xmlns:a="http://schemas.openxmlformats.org/drawingml/2006/main">
-            <a:srgbClr val="2C6E73"/>
+            <a:srgbClr val="D9E0E6"/>
           </a:solidFill>
           <a:ln xmlns:a="http://schemas.openxmlformats.org/drawingml/2006/main" w="0">
-            <a:noFill/>
+            <a:solidFill>
+              <a:srgbClr val="D9E0E6"/>
+            </a:solidFill>
           </a:ln>
         </p:spPr>
       </p:sp>
@@ -8441,19 +8445,19 @@
           <p:cNvPr id="15" name="">
             <a:extLst xmlns:a="http://schemas.openxmlformats.org/drawingml/2006/main">
               <a:ext uri="{FF2B5EF4-FFF2-40B4-BE49-F238E27FC236}">
-                <a16:creationId xmlns:a16="http://schemas.microsoft.com/office/drawing/2014/main" id="{D1A44810-6EE2-4DD7-9362-FDEC76F73F49}"/>
-              </a:ext>
-            </a:extLst>
-          </p:cNvPr>
-          <p:cNvSpPr>
-            <a:spLocks xmlns:a="http://schemas.openxmlformats.org/drawingml/2006/main" noGrp="1"/>
-          </p:cNvSpPr>
-          <p:nvPr/>
-        </p:nvSpPr>
-        <p:spPr>
-          <a:xfrm xmlns:a="http://schemas.openxmlformats.org/drawingml/2006/main">
-            <a:off x="1000125" y="3019425"/>
-            <a:ext cx="476250" cy="419100"/>
+                <a16:creationId xmlns:a16="http://schemas.microsoft.com/office/drawing/2014/main" id="{E8005A47-978B-4437-B261-F5E724EF1D4C}"/>
+              </a:ext>
+            </a:extLst>
+          </p:cNvPr>
+          <p:cNvSpPr>
+            <a:spLocks xmlns:a="http://schemas.openxmlformats.org/drawingml/2006/main" noGrp="1"/>
+          </p:cNvSpPr>
+          <p:nvPr/>
+        </p:nvSpPr>
+        <p:spPr>
+          <a:xfrm xmlns:a="http://schemas.openxmlformats.org/drawingml/2006/main">
+            <a:off x="1162050" y="2905125"/>
+            <a:ext cx="400050" cy="400050"/>
           </a:xfrm>
           <a:prstGeom xmlns:a="http://schemas.openxmlformats.org/drawingml/2006/main" prst="rect">
             <a:avLst/>
@@ -8470,9 +8474,9 @@
           <a:lstStyle xmlns:a="http://schemas.openxmlformats.org/drawingml/2006/main"/>
           <a:p xmlns:a="http://schemas.openxmlformats.org/drawingml/2006/main">
             <a:pPr algn="ctr">
-              <a:defRPr sz="1350" b="1">
-                <a:solidFill>
-                  <a:srgbClr val="FFFFFF"/>
+              <a:defRPr sz="1125" b="1">
+                <a:solidFill>
+                  <a:srgbClr val="2C6E73"/>
                 </a:solidFill>
                 <a:latin typeface="Arial"/>
                 <a:ea typeface="Arial"/>
@@ -8480,9 +8484,9 @@
               </a:defRPr>
             </a:pPr>
             <a:r>
-              <a:rPr sz="1350" b="1">
-                <a:solidFill>
-                  <a:srgbClr val="FFFFFF"/>
+              <a:rPr sz="1125" b="1">
+                <a:solidFill>
+                  <a:srgbClr val="2C6E73"/>
                 </a:solidFill>
                 <a:latin typeface="Arial"/>
                 <a:ea typeface="Arial"/>
@@ -8498,19 +8502,19 @@
           <p:cNvPr id="16" name="">
             <a:extLst xmlns:a="http://schemas.openxmlformats.org/drawingml/2006/main">
               <a:ext uri="{FF2B5EF4-FFF2-40B4-BE49-F238E27FC236}">
-                <a16:creationId xmlns:a16="http://schemas.microsoft.com/office/drawing/2014/main" id="{F0E23066-DC25-4314-8428-91D28DDA804E}"/>
-              </a:ext>
-            </a:extLst>
-          </p:cNvPr>
-          <p:cNvSpPr>
-            <a:spLocks xmlns:a="http://schemas.openxmlformats.org/drawingml/2006/main" noGrp="1"/>
-          </p:cNvSpPr>
-          <p:nvPr/>
-        </p:nvSpPr>
-        <p:spPr>
-          <a:xfrm xmlns:a="http://schemas.openxmlformats.org/drawingml/2006/main">
-            <a:off x="1714500" y="2924175"/>
-            <a:ext cx="9429750" cy="609600"/>
+                <a16:creationId xmlns:a16="http://schemas.microsoft.com/office/drawing/2014/main" id="{F48D4EB4-8E6B-4A97-8A1A-609566588E6E}"/>
+              </a:ext>
+            </a:extLst>
+          </p:cNvPr>
+          <p:cNvSpPr>
+            <a:spLocks xmlns:a="http://schemas.openxmlformats.org/drawingml/2006/main" noGrp="1"/>
+          </p:cNvSpPr>
+          <p:nvPr/>
+        </p:nvSpPr>
+        <p:spPr>
+          <a:xfrm xmlns:a="http://schemas.openxmlformats.org/drawingml/2006/main">
+            <a:off x="1714500" y="2819400"/>
+            <a:ext cx="9525000" cy="638175"/>
           </a:xfrm>
           <a:prstGeom xmlns:a="http://schemas.openxmlformats.org/drawingml/2006/main" prst="rect">
             <a:avLst/>
@@ -8527,7 +8531,7 @@
           <a:lstStyle xmlns:a="http://schemas.openxmlformats.org/drawingml/2006/main"/>
           <a:p xmlns:a="http://schemas.openxmlformats.org/drawingml/2006/main">
             <a:pPr algn="l">
-              <a:defRPr sz="1500" b="0">
+              <a:defRPr sz="1575" b="0">
                 <a:solidFill>
                   <a:srgbClr val="17253A"/>
                 </a:solidFill>
@@ -8537,7 +8541,7 @@
               </a:defRPr>
             </a:pPr>
             <a:r>
-              <a:rPr sz="1500" b="0">
+              <a:rPr sz="1575" b="0">
                 <a:solidFill>
                   <a:srgbClr val="17253A"/>
                 </a:solidFill>
@@ -8545,7 +8549,7 @@
                 <a:ea typeface="Arial"/>
                 <a:cs typeface="Arial"/>
               </a:rPr>
-              <a:t>Set up the method: Add or subtract the numerators while keeping the denominator.</a:t>
+              <a:t>Common denominator = 12</a:t>
             </a:r>
           </a:p>
         </p:txBody>
@@ -8555,28 +8559,30 @@
           <p:cNvPr id="17" name="">
             <a:extLst xmlns:a="http://schemas.openxmlformats.org/drawingml/2006/main">
               <a:ext uri="{FF2B5EF4-FFF2-40B4-BE49-F238E27FC236}">
-                <a16:creationId xmlns:a16="http://schemas.microsoft.com/office/drawing/2014/main" id="{0AB433C9-DCBA-45B5-8633-7F502426BE5B}"/>
-              </a:ext>
-            </a:extLst>
-          </p:cNvPr>
-          <p:cNvSpPr>
-            <a:spLocks xmlns:a="http://schemas.openxmlformats.org/drawingml/2006/main" noGrp="1"/>
-          </p:cNvSpPr>
-          <p:nvPr/>
-        </p:nvSpPr>
-        <p:spPr>
-          <a:xfrm xmlns:a="http://schemas.openxmlformats.org/drawingml/2006/main">
-            <a:off x="1000125" y="3733800"/>
-            <a:ext cx="476250" cy="476250"/>
-          </a:xfrm>
-          <a:prstGeom xmlns:a="http://schemas.openxmlformats.org/drawingml/2006/main" prst="ellipse">
+                <a16:creationId xmlns:a16="http://schemas.microsoft.com/office/drawing/2014/main" id="{9336F01C-B143-447C-B06C-0645F29D6F3F}"/>
+              </a:ext>
+            </a:extLst>
+          </p:cNvPr>
+          <p:cNvSpPr>
+            <a:spLocks xmlns:a="http://schemas.openxmlformats.org/drawingml/2006/main" noGrp="1"/>
+          </p:cNvSpPr>
+          <p:nvPr/>
+        </p:nvSpPr>
+        <p:spPr>
+          <a:xfrm xmlns:a="http://schemas.openxmlformats.org/drawingml/2006/main">
+            <a:off x="1714500" y="3476625"/>
+            <a:ext cx="9334500" cy="9525"/>
+          </a:xfrm>
+          <a:prstGeom xmlns:a="http://schemas.openxmlformats.org/drawingml/2006/main" prst="rect">
             <a:avLst/>
           </a:prstGeom>
           <a:solidFill xmlns:a="http://schemas.openxmlformats.org/drawingml/2006/main">
-            <a:srgbClr val="2C6E73"/>
+            <a:srgbClr val="D9E0E6"/>
           </a:solidFill>
           <a:ln xmlns:a="http://schemas.openxmlformats.org/drawingml/2006/main" w="0">
-            <a:noFill/>
+            <a:solidFill>
+              <a:srgbClr val="D9E0E6"/>
+            </a:solidFill>
           </a:ln>
         </p:spPr>
       </p:sp>
@@ -8585,19 +8591,19 @@
           <p:cNvPr id="18" name="">
             <a:extLst xmlns:a="http://schemas.openxmlformats.org/drawingml/2006/main">
               <a:ext uri="{FF2B5EF4-FFF2-40B4-BE49-F238E27FC236}">
-                <a16:creationId xmlns:a16="http://schemas.microsoft.com/office/drawing/2014/main" id="{688C3652-70B5-4FCA-A1DF-11179FF9D123}"/>
-              </a:ext>
-            </a:extLst>
-          </p:cNvPr>
-          <p:cNvSpPr>
-            <a:spLocks xmlns:a="http://schemas.openxmlformats.org/drawingml/2006/main" noGrp="1"/>
-          </p:cNvSpPr>
-          <p:nvPr/>
-        </p:nvSpPr>
-        <p:spPr>
-          <a:xfrm xmlns:a="http://schemas.openxmlformats.org/drawingml/2006/main">
-            <a:off x="1000125" y="3762375"/>
-            <a:ext cx="476250" cy="419100"/>
+                <a16:creationId xmlns:a16="http://schemas.microsoft.com/office/drawing/2014/main" id="{4DFC7D95-36F4-4E24-9E2E-4109F2BBD250}"/>
+              </a:ext>
+            </a:extLst>
+          </p:cNvPr>
+          <p:cNvSpPr>
+            <a:spLocks xmlns:a="http://schemas.openxmlformats.org/drawingml/2006/main" noGrp="1"/>
+          </p:cNvSpPr>
+          <p:nvPr/>
+        </p:nvSpPr>
+        <p:spPr>
+          <a:xfrm xmlns:a="http://schemas.openxmlformats.org/drawingml/2006/main">
+            <a:off x="1162050" y="3609975"/>
+            <a:ext cx="400050" cy="400050"/>
           </a:xfrm>
           <a:prstGeom xmlns:a="http://schemas.openxmlformats.org/drawingml/2006/main" prst="rect">
             <a:avLst/>
@@ -8614,9 +8620,9 @@
           <a:lstStyle xmlns:a="http://schemas.openxmlformats.org/drawingml/2006/main"/>
           <a:p xmlns:a="http://schemas.openxmlformats.org/drawingml/2006/main">
             <a:pPr algn="ctr">
-              <a:defRPr sz="1350" b="1">
-                <a:solidFill>
-                  <a:srgbClr val="FFFFFF"/>
+              <a:defRPr sz="1125" b="1">
+                <a:solidFill>
+                  <a:srgbClr val="2C6E73"/>
                 </a:solidFill>
                 <a:latin typeface="Arial"/>
                 <a:ea typeface="Arial"/>
@@ -8624,9 +8630,9 @@
               </a:defRPr>
             </a:pPr>
             <a:r>
-              <a:rPr sz="1350" b="1">
-                <a:solidFill>
-                  <a:srgbClr val="FFFFFF"/>
+              <a:rPr sz="1125" b="1">
+                <a:solidFill>
+                  <a:srgbClr val="2C6E73"/>
                 </a:solidFill>
                 <a:latin typeface="Arial"/>
                 <a:ea typeface="Arial"/>
@@ -8642,19 +8648,19 @@
           <p:cNvPr id="19" name="">
             <a:extLst xmlns:a="http://schemas.openxmlformats.org/drawingml/2006/main">
               <a:ext uri="{FF2B5EF4-FFF2-40B4-BE49-F238E27FC236}">
-                <a16:creationId xmlns:a16="http://schemas.microsoft.com/office/drawing/2014/main" id="{B5B27360-C49E-4DB8-BFD7-57008563B47F}"/>
-              </a:ext>
-            </a:extLst>
-          </p:cNvPr>
-          <p:cNvSpPr>
-            <a:spLocks xmlns:a="http://schemas.openxmlformats.org/drawingml/2006/main" noGrp="1"/>
-          </p:cNvSpPr>
-          <p:nvPr/>
-        </p:nvSpPr>
-        <p:spPr>
-          <a:xfrm xmlns:a="http://schemas.openxmlformats.org/drawingml/2006/main">
-            <a:off x="1714500" y="3667125"/>
-            <a:ext cx="9429750" cy="609600"/>
+                <a16:creationId xmlns:a16="http://schemas.microsoft.com/office/drawing/2014/main" id="{B7456D62-3089-4AD3-A32A-1C015CB8E15F}"/>
+              </a:ext>
+            </a:extLst>
+          </p:cNvPr>
+          <p:cNvSpPr>
+            <a:spLocks xmlns:a="http://schemas.openxmlformats.org/drawingml/2006/main" noGrp="1"/>
+          </p:cNvSpPr>
+          <p:nvPr/>
+        </p:nvSpPr>
+        <p:spPr>
+          <a:xfrm xmlns:a="http://schemas.openxmlformats.org/drawingml/2006/main">
+            <a:off x="1714500" y="3524250"/>
+            <a:ext cx="9525000" cy="638175"/>
           </a:xfrm>
           <a:prstGeom xmlns:a="http://schemas.openxmlformats.org/drawingml/2006/main" prst="rect">
             <a:avLst/>
@@ -8671,7 +8677,7 @@
           <a:lstStyle xmlns:a="http://schemas.openxmlformats.org/drawingml/2006/main"/>
           <a:p xmlns:a="http://schemas.openxmlformats.org/drawingml/2006/main">
             <a:pPr algn="l">
-              <a:defRPr sz="1500" b="0">
+              <a:defRPr sz="1575" b="0">
                 <a:solidFill>
                   <a:srgbClr val="17253A"/>
                 </a:solidFill>
@@ -8681,7 +8687,7 @@
               </a:defRPr>
             </a:pPr>
             <a:r>
-              <a:rPr sz="1500" b="0">
+              <a:rPr sz="1575" b="0">
                 <a:solidFill>
                   <a:srgbClr val="17253A"/>
                 </a:solidFill>
@@ -8689,7 +8695,7 @@
                 <a:ea typeface="Arial"/>
                 <a:cs typeface="Arial"/>
               </a:rPr>
-              <a:t>Complete the calculation: 2 7/12.</a:t>
+              <a:t>5 3/12 - 2 8/12</a:t>
             </a:r>
           </a:p>
         </p:txBody>
@@ -8699,28 +8705,30 @@
           <p:cNvPr id="20" name="">
             <a:extLst xmlns:a="http://schemas.openxmlformats.org/drawingml/2006/main">
               <a:ext uri="{FF2B5EF4-FFF2-40B4-BE49-F238E27FC236}">
-                <a16:creationId xmlns:a16="http://schemas.microsoft.com/office/drawing/2014/main" id="{D26E8CA6-761D-4689-9272-4C4F656AD7AA}"/>
-              </a:ext>
-            </a:extLst>
-          </p:cNvPr>
-          <p:cNvSpPr>
-            <a:spLocks xmlns:a="http://schemas.openxmlformats.org/drawingml/2006/main" noGrp="1"/>
-          </p:cNvSpPr>
-          <p:nvPr/>
-        </p:nvSpPr>
-        <p:spPr>
-          <a:xfrm xmlns:a="http://schemas.openxmlformats.org/drawingml/2006/main">
-            <a:off x="1000125" y="4476750"/>
-            <a:ext cx="476250" cy="476250"/>
-          </a:xfrm>
-          <a:prstGeom xmlns:a="http://schemas.openxmlformats.org/drawingml/2006/main" prst="ellipse">
+                <a16:creationId xmlns:a16="http://schemas.microsoft.com/office/drawing/2014/main" id="{60012C1A-5F7B-43AF-8C1F-143594D32A42}"/>
+              </a:ext>
+            </a:extLst>
+          </p:cNvPr>
+          <p:cNvSpPr>
+            <a:spLocks xmlns:a="http://schemas.openxmlformats.org/drawingml/2006/main" noGrp="1"/>
+          </p:cNvSpPr>
+          <p:nvPr/>
+        </p:nvSpPr>
+        <p:spPr>
+          <a:xfrm xmlns:a="http://schemas.openxmlformats.org/drawingml/2006/main">
+            <a:off x="1714500" y="4181475"/>
+            <a:ext cx="9334500" cy="9525"/>
+          </a:xfrm>
+          <a:prstGeom xmlns:a="http://schemas.openxmlformats.org/drawingml/2006/main" prst="rect">
             <a:avLst/>
           </a:prstGeom>
           <a:solidFill xmlns:a="http://schemas.openxmlformats.org/drawingml/2006/main">
-            <a:srgbClr val="2C6E73"/>
+            <a:srgbClr val="D9E0E6"/>
           </a:solidFill>
           <a:ln xmlns:a="http://schemas.openxmlformats.org/drawingml/2006/main" w="0">
-            <a:noFill/>
+            <a:solidFill>
+              <a:srgbClr val="D9E0E6"/>
+            </a:solidFill>
           </a:ln>
         </p:spPr>
       </p:sp>
@@ -8729,19 +8737,19 @@
           <p:cNvPr id="21" name="">
             <a:extLst xmlns:a="http://schemas.openxmlformats.org/drawingml/2006/main">
               <a:ext uri="{FF2B5EF4-FFF2-40B4-BE49-F238E27FC236}">
-                <a16:creationId xmlns:a16="http://schemas.microsoft.com/office/drawing/2014/main" id="{7C88849C-52FD-41E0-AE23-8C410B7A333F}"/>
-              </a:ext>
-            </a:extLst>
-          </p:cNvPr>
-          <p:cNvSpPr>
-            <a:spLocks xmlns:a="http://schemas.openxmlformats.org/drawingml/2006/main" noGrp="1"/>
-          </p:cNvSpPr>
-          <p:nvPr/>
-        </p:nvSpPr>
-        <p:spPr>
-          <a:xfrm xmlns:a="http://schemas.openxmlformats.org/drawingml/2006/main">
-            <a:off x="1000125" y="4505325"/>
-            <a:ext cx="476250" cy="419100"/>
+                <a16:creationId xmlns:a16="http://schemas.microsoft.com/office/drawing/2014/main" id="{F972F3F9-DD36-4006-B6CC-24FF63C09191}"/>
+              </a:ext>
+            </a:extLst>
+          </p:cNvPr>
+          <p:cNvSpPr>
+            <a:spLocks xmlns:a="http://schemas.openxmlformats.org/drawingml/2006/main" noGrp="1"/>
+          </p:cNvSpPr>
+          <p:nvPr/>
+        </p:nvSpPr>
+        <p:spPr>
+          <a:xfrm xmlns:a="http://schemas.openxmlformats.org/drawingml/2006/main">
+            <a:off x="1162050" y="4314825"/>
+            <a:ext cx="400050" cy="400050"/>
           </a:xfrm>
           <a:prstGeom xmlns:a="http://schemas.openxmlformats.org/drawingml/2006/main" prst="rect">
             <a:avLst/>
@@ -8758,9 +8766,9 @@
           <a:lstStyle xmlns:a="http://schemas.openxmlformats.org/drawingml/2006/main"/>
           <a:p xmlns:a="http://schemas.openxmlformats.org/drawingml/2006/main">
             <a:pPr algn="ctr">
-              <a:defRPr sz="1350" b="1">
-                <a:solidFill>
-                  <a:srgbClr val="FFFFFF"/>
+              <a:defRPr sz="1125" b="1">
+                <a:solidFill>
+                  <a:srgbClr val="2C6E73"/>
                 </a:solidFill>
                 <a:latin typeface="Arial"/>
                 <a:ea typeface="Arial"/>
@@ -8768,9 +8776,9 @@
               </a:defRPr>
             </a:pPr>
             <a:r>
-              <a:rPr sz="1350" b="1">
-                <a:solidFill>
-                  <a:srgbClr val="FFFFFF"/>
+              <a:rPr sz="1125" b="1">
+                <a:solidFill>
+                  <a:srgbClr val="2C6E73"/>
                 </a:solidFill>
                 <a:latin typeface="Arial"/>
                 <a:ea typeface="Arial"/>
@@ -8786,19 +8794,19 @@
           <p:cNvPr id="22" name="">
             <a:extLst xmlns:a="http://schemas.openxmlformats.org/drawingml/2006/main">
               <a:ext uri="{FF2B5EF4-FFF2-40B4-BE49-F238E27FC236}">
-                <a16:creationId xmlns:a16="http://schemas.microsoft.com/office/drawing/2014/main" id="{DD71D0C9-5656-4829-B41F-B4F1294642F2}"/>
-              </a:ext>
-            </a:extLst>
-          </p:cNvPr>
-          <p:cNvSpPr>
-            <a:spLocks xmlns:a="http://schemas.openxmlformats.org/drawingml/2006/main" noGrp="1"/>
-          </p:cNvSpPr>
-          <p:nvPr/>
-        </p:nvSpPr>
-        <p:spPr>
-          <a:xfrm xmlns:a="http://schemas.openxmlformats.org/drawingml/2006/main">
-            <a:off x="1714500" y="4410075"/>
-            <a:ext cx="9429750" cy="609600"/>
+                <a16:creationId xmlns:a16="http://schemas.microsoft.com/office/drawing/2014/main" id="{AA11AE98-0EEA-4BA6-9347-18696850AE91}"/>
+              </a:ext>
+            </a:extLst>
+          </p:cNvPr>
+          <p:cNvSpPr>
+            <a:spLocks xmlns:a="http://schemas.openxmlformats.org/drawingml/2006/main" noGrp="1"/>
+          </p:cNvSpPr>
+          <p:nvPr/>
+        </p:nvSpPr>
+        <p:spPr>
+          <a:xfrm xmlns:a="http://schemas.openxmlformats.org/drawingml/2006/main">
+            <a:off x="1714500" y="4229100"/>
+            <a:ext cx="9525000" cy="638175"/>
           </a:xfrm>
           <a:prstGeom xmlns:a="http://schemas.openxmlformats.org/drawingml/2006/main" prst="rect">
             <a:avLst/>
@@ -8815,9 +8823,9 @@
           <a:lstStyle xmlns:a="http://schemas.openxmlformats.org/drawingml/2006/main"/>
           <a:p xmlns:a="http://schemas.openxmlformats.org/drawingml/2006/main">
             <a:pPr algn="l">
-              <a:defRPr sz="1500" b="1">
-                <a:solidFill>
-                  <a:srgbClr val="2F785D"/>
+              <a:defRPr sz="1575" b="0">
+                <a:solidFill>
+                  <a:srgbClr val="17253A"/>
                 </a:solidFill>
                 <a:latin typeface="Arial"/>
                 <a:ea typeface="Arial"/>
@@ -8825,15 +8833,161 @@
               </a:defRPr>
             </a:pPr>
             <a:r>
-              <a:rPr sz="1500" b="1">
+              <a:rPr sz="1575" b="0">
+                <a:solidFill>
+                  <a:srgbClr val="17253A"/>
+                </a:solidFill>
+                <a:latin typeface="Arial"/>
+                <a:ea typeface="Arial"/>
+                <a:cs typeface="Arial"/>
+              </a:rPr>
+              <a:t>Exchange: 4 15/12 - 2 8/12</a:t>
+            </a:r>
+          </a:p>
+        </p:txBody>
+      </p:sp>
+      <p:sp>
+        <p:nvSpPr>
+          <p:cNvPr id="23" name="">
+            <a:extLst xmlns:a="http://schemas.openxmlformats.org/drawingml/2006/main">
+              <a:ext uri="{FF2B5EF4-FFF2-40B4-BE49-F238E27FC236}">
+                <a16:creationId xmlns:a16="http://schemas.microsoft.com/office/drawing/2014/main" id="{23DDC16D-C58D-475D-B1A8-E016B89B70EF}"/>
+              </a:ext>
+            </a:extLst>
+          </p:cNvPr>
+          <p:cNvSpPr>
+            <a:spLocks xmlns:a="http://schemas.openxmlformats.org/drawingml/2006/main" noGrp="1"/>
+          </p:cNvSpPr>
+          <p:nvPr/>
+        </p:nvSpPr>
+        <p:spPr>
+          <a:xfrm xmlns:a="http://schemas.openxmlformats.org/drawingml/2006/main">
+            <a:off x="1714500" y="4886325"/>
+            <a:ext cx="9334500" cy="9525"/>
+          </a:xfrm>
+          <a:prstGeom xmlns:a="http://schemas.openxmlformats.org/drawingml/2006/main" prst="rect">
+            <a:avLst/>
+          </a:prstGeom>
+          <a:solidFill xmlns:a="http://schemas.openxmlformats.org/drawingml/2006/main">
+            <a:srgbClr val="D9E0E6"/>
+          </a:solidFill>
+          <a:ln xmlns:a="http://schemas.openxmlformats.org/drawingml/2006/main" w="0">
+            <a:solidFill>
+              <a:srgbClr val="D9E0E6"/>
+            </a:solidFill>
+          </a:ln>
+        </p:spPr>
+      </p:sp>
+      <p:sp>
+        <p:nvSpPr>
+          <p:cNvPr id="24" name="">
+            <a:extLst xmlns:a="http://schemas.openxmlformats.org/drawingml/2006/main">
+              <a:ext uri="{FF2B5EF4-FFF2-40B4-BE49-F238E27FC236}">
+                <a16:creationId xmlns:a16="http://schemas.microsoft.com/office/drawing/2014/main" id="{B73B1671-95E3-4938-84D9-7C284D2F118B}"/>
+              </a:ext>
+            </a:extLst>
+          </p:cNvPr>
+          <p:cNvSpPr>
+            <a:spLocks xmlns:a="http://schemas.openxmlformats.org/drawingml/2006/main" noGrp="1"/>
+          </p:cNvSpPr>
+          <p:nvPr/>
+        </p:nvSpPr>
+        <p:spPr>
+          <a:xfrm xmlns:a="http://schemas.openxmlformats.org/drawingml/2006/main">
+            <a:off x="1162050" y="5019675"/>
+            <a:ext cx="400050" cy="400050"/>
+          </a:xfrm>
+          <a:prstGeom xmlns:a="http://schemas.openxmlformats.org/drawingml/2006/main" prst="rect">
+            <a:avLst/>
+          </a:prstGeom>
+          <a:noFill xmlns:a="http://schemas.openxmlformats.org/drawingml/2006/main"/>
+          <a:ln xmlns:a="http://schemas.openxmlformats.org/drawingml/2006/main" w="0">
+            <a:noFill/>
+          </a:ln>
+        </p:spPr>
+        <p:txBody>
+          <a:bodyPr xmlns:a="http://schemas.openxmlformats.org/drawingml/2006/main" anchor="ctr">
+            <a:normAutofit fontScale="100000"/>
+          </a:bodyPr>
+          <a:lstStyle xmlns:a="http://schemas.openxmlformats.org/drawingml/2006/main"/>
+          <a:p xmlns:a="http://schemas.openxmlformats.org/drawingml/2006/main">
+            <a:pPr algn="ctr">
+              <a:defRPr sz="1125" b="1">
                 <a:solidFill>
                   <a:srgbClr val="2F785D"/>
                 </a:solidFill>
                 <a:latin typeface="Arial"/>
                 <a:ea typeface="Arial"/>
                 <a:cs typeface="Arial"/>
+              </a:defRPr>
+            </a:pPr>
+            <a:r>
+              <a:rPr sz="1125" b="1">
+                <a:solidFill>
+                  <a:srgbClr val="2F785D"/>
+                </a:solidFill>
+                <a:latin typeface="Arial"/>
+                <a:ea typeface="Arial"/>
+                <a:cs typeface="Arial"/>
               </a:rPr>
-              <a:t>Check the result: Simplify and convert the answer when appropriate.</a:t>
+              <a:t>5</a:t>
+            </a:r>
+          </a:p>
+        </p:txBody>
+      </p:sp>
+      <p:sp>
+        <p:nvSpPr>
+          <p:cNvPr id="25" name="">
+            <a:extLst xmlns:a="http://schemas.openxmlformats.org/drawingml/2006/main">
+              <a:ext uri="{FF2B5EF4-FFF2-40B4-BE49-F238E27FC236}">
+                <a16:creationId xmlns:a16="http://schemas.microsoft.com/office/drawing/2014/main" id="{D50BC432-BE29-4E5A-807E-8283C56BE2EC}"/>
+              </a:ext>
+            </a:extLst>
+          </p:cNvPr>
+          <p:cNvSpPr>
+            <a:spLocks xmlns:a="http://schemas.openxmlformats.org/drawingml/2006/main" noGrp="1"/>
+          </p:cNvSpPr>
+          <p:nvPr/>
+        </p:nvSpPr>
+        <p:spPr>
+          <a:xfrm xmlns:a="http://schemas.openxmlformats.org/drawingml/2006/main">
+            <a:off x="1714500" y="4933950"/>
+            <a:ext cx="9525000" cy="638175"/>
+          </a:xfrm>
+          <a:prstGeom xmlns:a="http://schemas.openxmlformats.org/drawingml/2006/main" prst="rect">
+            <a:avLst/>
+          </a:prstGeom>
+          <a:noFill xmlns:a="http://schemas.openxmlformats.org/drawingml/2006/main"/>
+          <a:ln xmlns:a="http://schemas.openxmlformats.org/drawingml/2006/main" w="0">
+            <a:noFill/>
+          </a:ln>
+        </p:spPr>
+        <p:txBody>
+          <a:bodyPr xmlns:a="http://schemas.openxmlformats.org/drawingml/2006/main" anchor="ctr">
+            <a:normAutofit fontScale="100000"/>
+          </a:bodyPr>
+          <a:lstStyle xmlns:a="http://schemas.openxmlformats.org/drawingml/2006/main"/>
+          <a:p xmlns:a="http://schemas.openxmlformats.org/drawingml/2006/main">
+            <a:pPr algn="l">
+              <a:defRPr sz="1575" b="1">
+                <a:solidFill>
+                  <a:srgbClr val="2F785D"/>
+                </a:solidFill>
+                <a:latin typeface="Arial"/>
+                <a:ea typeface="Arial"/>
+                <a:cs typeface="Arial"/>
+              </a:defRPr>
+            </a:pPr>
+            <a:r>
+              <a:rPr sz="1575" b="1">
+                <a:solidFill>
+                  <a:srgbClr val="2F785D"/>
+                </a:solidFill>
+                <a:latin typeface="Arial"/>
+                <a:ea typeface="Arial"/>
+                <a:cs typeface="Arial"/>
+              </a:rPr>
+              <a:t>2 7/12</a:t>
             </a:r>
           </a:p>
         </p:txBody>
@@ -8841,7 +8995,7 @@
     </p:spTree>
     <p:extLst>
       <p:ext uri="{BB962C8B-B14F-4D97-AF65-F5344CB8AC3E}">
-        <p14:creationId xmlns:p14="http://schemas.microsoft.com/office/powerpoint/2010/main" val="1840884615"/>
+        <p14:creationId xmlns:p14="http://schemas.microsoft.com/office/powerpoint/2010/main" val="99971300"/>
       </p:ext>
     </p:extLst>
   </p:cSld>
@@ -9078,6 +9232,51 @@
                       </p:childTnLst>
                     </p:cTn>
                   </p:par>
+                  <p:par>
+                    <p:cTn id="23" fill="hold">
+                      <p:stCondLst>
+                        <p:cond delay="indefinite"/>
+                      </p:stCondLst>
+                      <p:childTnLst>
+                        <p:par>
+                          <p:cTn id="24" fill="hold">
+                            <p:stCondLst>
+                              <p:cond delay="0"/>
+                            </p:stCondLst>
+                            <p:childTnLst>
+                              <p:par>
+                                <p:cTn id="25" presetID="1" presetClass="entr" presetSubtype="0" fill="hold" grpId="0" nodeType="clickEffect">
+                                  <p:stCondLst>
+                                    <p:cond delay="0"/>
+                                  </p:stCondLst>
+                                  <p:childTnLst>
+                                    <p:set>
+                                      <p:cBhvr>
+                                        <p:cTn id="26" dur="1" fill="hold">
+                                          <p:stCondLst>
+                                            <p:cond delay="0"/>
+                                          </p:stCondLst>
+                                        </p:cTn>
+                                        <p:tgtEl>
+                                          <p:spTgt spid="25"/>
+                                        </p:tgtEl>
+                                        <p:attrNameLst>
+                                          <p:attrName>style.visibility</p:attrName>
+                                        </p:attrNameLst>
+                                      </p:cBhvr>
+                                      <p:to>
+                                        <p:strVal val="visible"/>
+                                      </p:to>
+                                    </p:set>
+                                  </p:childTnLst>
+                                </p:cTn>
+                              </p:par>
+                            </p:childTnLst>
+                          </p:cTn>
+                        </p:par>
+                      </p:childTnLst>
+                    </p:cTn>
+                  </p:par>
                 </p:childTnLst>
               </p:cTn>
               <p:prevCondLst>
@@ -9105,6 +9304,7 @@
       <p:bldP spid="16" grpId="0"/>
       <p:bldP spid="19" grpId="0"/>
       <p:bldP spid="22" grpId="0"/>
+      <p:bldP spid="25" grpId="0"/>
     </p:bldLst>
   </p:timing>
 </p:sld>
@@ -9134,7 +9334,7 @@
           <p:cNvPr id="15" name="">
             <a:extLst xmlns:a="http://schemas.openxmlformats.org/drawingml/2006/main">
               <a:ext uri="{FF2B5EF4-FFF2-40B4-BE49-F238E27FC236}">
-                <a16:creationId xmlns:a16="http://schemas.microsoft.com/office/drawing/2014/main" id="{00C9987B-2D4E-4405-8A09-0B83F9667D11}"/>
+                <a16:creationId xmlns:a16="http://schemas.microsoft.com/office/drawing/2014/main" id="{04C1120F-F1E2-4C2A-A9EA-FC45EF67CA4E}"/>
               </a:ext>
             </a:extLst>
           </p:cNvPr>
@@ -9166,7 +9366,7 @@
           <p:cNvPr id="2" name="">
             <a:extLst xmlns:a="http://schemas.openxmlformats.org/drawingml/2006/main">
               <a:ext uri="{FF2B5EF4-FFF2-40B4-BE49-F238E27FC236}">
-                <a16:creationId xmlns:a16="http://schemas.microsoft.com/office/drawing/2014/main" id="{627AE45F-8DE3-4C03-8913-5276735D8A0E}"/>
+                <a16:creationId xmlns:a16="http://schemas.microsoft.com/office/drawing/2014/main" id="{F26A02D5-E191-4B20-B935-96700C6E9AE3}"/>
               </a:ext>
             </a:extLst>
           </p:cNvPr>
@@ -9223,7 +9423,7 @@
           <p:cNvPr id="3" name="">
             <a:extLst xmlns:a="http://schemas.openxmlformats.org/drawingml/2006/main">
               <a:ext uri="{FF2B5EF4-FFF2-40B4-BE49-F238E27FC236}">
-                <a16:creationId xmlns:a16="http://schemas.microsoft.com/office/drawing/2014/main" id="{E10305B6-A039-442D-9FA2-3933BB5DFC5C}"/>
+                <a16:creationId xmlns:a16="http://schemas.microsoft.com/office/drawing/2014/main" id="{5C421C4C-1CE1-4F53-81CE-EE1F3E640A26}"/>
               </a:ext>
             </a:extLst>
           </p:cNvPr>
@@ -9255,7 +9455,7 @@
           <p:cNvPr id="4" name="">
             <a:extLst xmlns:a="http://schemas.openxmlformats.org/drawingml/2006/main">
               <a:ext uri="{FF2B5EF4-FFF2-40B4-BE49-F238E27FC236}">
-                <a16:creationId xmlns:a16="http://schemas.microsoft.com/office/drawing/2014/main" id="{93BC6B8D-58D5-4E12-A8F4-283183C45975}"/>
+                <a16:creationId xmlns:a16="http://schemas.microsoft.com/office/drawing/2014/main" id="{0D4451CD-C198-4520-A9EE-C667CA796F8F}"/>
               </a:ext>
             </a:extLst>
           </p:cNvPr>
@@ -9312,7 +9512,7 @@
           <p:cNvPr id="5" name="">
             <a:extLst xmlns:a="http://schemas.openxmlformats.org/drawingml/2006/main">
               <a:ext uri="{FF2B5EF4-FFF2-40B4-BE49-F238E27FC236}">
-                <a16:creationId xmlns:a16="http://schemas.microsoft.com/office/drawing/2014/main" id="{B2082A8A-29CF-4FB0-83E5-E883600E4171}"/>
+                <a16:creationId xmlns:a16="http://schemas.microsoft.com/office/drawing/2014/main" id="{326996FE-8AAE-4FDD-9AA2-E7F1F963226C}"/>
               </a:ext>
             </a:extLst>
           </p:cNvPr>
@@ -9369,7 +9569,7 @@
           <p:cNvPr id="6" name="">
             <a:extLst xmlns:a="http://schemas.openxmlformats.org/drawingml/2006/main">
               <a:ext uri="{FF2B5EF4-FFF2-40B4-BE49-F238E27FC236}">
-                <a16:creationId xmlns:a16="http://schemas.microsoft.com/office/drawing/2014/main" id="{18E203E7-843C-437A-BB9F-F066277B3D7B}"/>
+                <a16:creationId xmlns:a16="http://schemas.microsoft.com/office/drawing/2014/main" id="{B1A6ADDA-EC42-4747-8904-6B91595E053B}"/>
               </a:ext>
             </a:extLst>
           </p:cNvPr>
@@ -9426,7 +9626,7 @@
           <p:cNvPr id="7" name="">
             <a:extLst xmlns:a="http://schemas.openxmlformats.org/drawingml/2006/main">
               <a:ext uri="{FF2B5EF4-FFF2-40B4-BE49-F238E27FC236}">
-                <a16:creationId xmlns:a16="http://schemas.microsoft.com/office/drawing/2014/main" id="{F9F12722-4A05-431C-A6AE-230D16288927}"/>
+                <a16:creationId xmlns:a16="http://schemas.microsoft.com/office/drawing/2014/main" id="{D38A2133-DB65-478E-A61C-9F97A8733757}"/>
               </a:ext>
             </a:extLst>
           </p:cNvPr>
@@ -9458,7 +9658,7 @@
           <p:cNvPr id="8" name="">
             <a:extLst xmlns:a="http://schemas.openxmlformats.org/drawingml/2006/main">
               <a:ext uri="{FF2B5EF4-FFF2-40B4-BE49-F238E27FC236}">
-                <a16:creationId xmlns:a16="http://schemas.microsoft.com/office/drawing/2014/main" id="{D5758AAA-E81A-4029-9676-C92C32E8123C}"/>
+                <a16:creationId xmlns:a16="http://schemas.microsoft.com/office/drawing/2014/main" id="{7194A814-A2A4-482B-B742-E5A1527FBBB5}"/>
               </a:ext>
             </a:extLst>
           </p:cNvPr>
@@ -9515,7 +9715,7 @@
           <p:cNvPr id="9" name="">
             <a:extLst xmlns:a="http://schemas.openxmlformats.org/drawingml/2006/main">
               <a:ext uri="{FF2B5EF4-FFF2-40B4-BE49-F238E27FC236}">
-                <a16:creationId xmlns:a16="http://schemas.microsoft.com/office/drawing/2014/main" id="{98F727F1-8BC7-4C3C-8C4B-31C34064D521}"/>
+                <a16:creationId xmlns:a16="http://schemas.microsoft.com/office/drawing/2014/main" id="{A66286D6-F7B5-4F3B-ADA9-8C74A9B2EC77}"/>
               </a:ext>
             </a:extLst>
           </p:cNvPr>
@@ -9572,7 +9772,7 @@
           <p:cNvPr id="10" name="">
             <a:extLst xmlns:a="http://schemas.openxmlformats.org/drawingml/2006/main">
               <a:ext uri="{FF2B5EF4-FFF2-40B4-BE49-F238E27FC236}">
-                <a16:creationId xmlns:a16="http://schemas.microsoft.com/office/drawing/2014/main" id="{6381C7B3-7FE3-4F13-9F14-23B2809408DD}"/>
+                <a16:creationId xmlns:a16="http://schemas.microsoft.com/office/drawing/2014/main" id="{77633E4F-A370-47C4-99A7-D860265494FE}"/>
               </a:ext>
             </a:extLst>
           </p:cNvPr>
@@ -9629,7 +9829,7 @@
           <p:cNvPr id="11" name="">
             <a:extLst xmlns:a="http://schemas.openxmlformats.org/drawingml/2006/main">
               <a:ext uri="{FF2B5EF4-FFF2-40B4-BE49-F238E27FC236}">
-                <a16:creationId xmlns:a16="http://schemas.microsoft.com/office/drawing/2014/main" id="{39596948-B8CE-49C3-BDF7-CA9765BA673A}"/>
+                <a16:creationId xmlns:a16="http://schemas.microsoft.com/office/drawing/2014/main" id="{949DE4F0-C2D4-493D-B005-B651235F216A}"/>
               </a:ext>
             </a:extLst>
           </p:cNvPr>
@@ -9686,7 +9886,7 @@
           <p:cNvPr id="12" name="">
             <a:extLst xmlns:a="http://schemas.openxmlformats.org/drawingml/2006/main">
               <a:ext uri="{FF2B5EF4-FFF2-40B4-BE49-F238E27FC236}">
-                <a16:creationId xmlns:a16="http://schemas.microsoft.com/office/drawing/2014/main" id="{7ECE45AA-0269-4CE7-9025-A26FA489A0C6}"/>
+                <a16:creationId xmlns:a16="http://schemas.microsoft.com/office/drawing/2014/main" id="{135CB2B8-4065-4D13-B525-1BA6B3E9F69B}"/>
               </a:ext>
             </a:extLst>
           </p:cNvPr>
@@ -9718,7 +9918,7 @@
           <p:cNvPr id="13" name="">
             <a:extLst xmlns:a="http://schemas.openxmlformats.org/drawingml/2006/main">
               <a:ext uri="{FF2B5EF4-FFF2-40B4-BE49-F238E27FC236}">
-                <a16:creationId xmlns:a16="http://schemas.microsoft.com/office/drawing/2014/main" id="{DAC23721-F80F-4BC4-8981-3E34598BC9FD}"/>
+                <a16:creationId xmlns:a16="http://schemas.microsoft.com/office/drawing/2014/main" id="{0A5D3F24-6432-4D65-80E2-0A453332F94D}"/>
               </a:ext>
             </a:extLst>
           </p:cNvPr>
@@ -9775,7 +9975,7 @@
           <p:cNvPr id="14" name="">
             <a:extLst xmlns:a="http://schemas.openxmlformats.org/drawingml/2006/main">
               <a:ext uri="{FF2B5EF4-FFF2-40B4-BE49-F238E27FC236}">
-                <a16:creationId xmlns:a16="http://schemas.microsoft.com/office/drawing/2014/main" id="{318A1132-301A-485C-8A4C-780D42337574}"/>
+                <a16:creationId xmlns:a16="http://schemas.microsoft.com/office/drawing/2014/main" id="{67E66C46-9FEF-4903-B090-DF437F9392C3}"/>
               </a:ext>
             </a:extLst>
           </p:cNvPr>
@@ -9830,7 +10030,7 @@
     </p:spTree>
     <p:extLst>
       <p:ext uri="{BB962C8B-B14F-4D97-AF65-F5344CB8AC3E}">
-        <p14:creationId xmlns:p14="http://schemas.microsoft.com/office/powerpoint/2010/main" val="1791241037"/>
+        <p14:creationId xmlns:p14="http://schemas.microsoft.com/office/powerpoint/2010/main" val="1826646080"/>
       </p:ext>
     </p:extLst>
   </p:cSld>
@@ -10031,7 +10231,7 @@
           <p:cNvPr id="16" name="">
             <a:extLst xmlns:a="http://schemas.openxmlformats.org/drawingml/2006/main">
               <a:ext uri="{FF2B5EF4-FFF2-40B4-BE49-F238E27FC236}">
-                <a16:creationId xmlns:a16="http://schemas.microsoft.com/office/drawing/2014/main" id="{1E2AA8B7-E1C5-43E9-ADA5-057146F34203}"/>
+                <a16:creationId xmlns:a16="http://schemas.microsoft.com/office/drawing/2014/main" id="{31DA492A-8664-42E2-9A1F-436F2C85F6F1}"/>
               </a:ext>
             </a:extLst>
           </p:cNvPr>
@@ -10063,7 +10263,7 @@
           <p:cNvPr id="2" name="">
             <a:extLst xmlns:a="http://schemas.openxmlformats.org/drawingml/2006/main">
               <a:ext uri="{FF2B5EF4-FFF2-40B4-BE49-F238E27FC236}">
-                <a16:creationId xmlns:a16="http://schemas.microsoft.com/office/drawing/2014/main" id="{32983E19-B718-4AE8-9D01-3FC3245159A1}"/>
+                <a16:creationId xmlns:a16="http://schemas.microsoft.com/office/drawing/2014/main" id="{F875C934-420D-40F2-873C-0A328E41DF44}"/>
               </a:ext>
             </a:extLst>
           </p:cNvPr>
@@ -10120,7 +10320,7 @@
           <p:cNvPr id="3" name="">
             <a:extLst xmlns:a="http://schemas.openxmlformats.org/drawingml/2006/main">
               <a:ext uri="{FF2B5EF4-FFF2-40B4-BE49-F238E27FC236}">
-                <a16:creationId xmlns:a16="http://schemas.microsoft.com/office/drawing/2014/main" id="{A0D103DA-6C68-4079-AAB1-E213AE416F5C}"/>
+                <a16:creationId xmlns:a16="http://schemas.microsoft.com/office/drawing/2014/main" id="{92EAE5B1-5B3A-4C73-8912-060B091D01A2}"/>
               </a:ext>
             </a:extLst>
           </p:cNvPr>
@@ -10152,7 +10352,7 @@
           <p:cNvPr id="4" name="">
             <a:extLst xmlns:a="http://schemas.openxmlformats.org/drawingml/2006/main">
               <a:ext uri="{FF2B5EF4-FFF2-40B4-BE49-F238E27FC236}">
-                <a16:creationId xmlns:a16="http://schemas.microsoft.com/office/drawing/2014/main" id="{C42DEAD5-F39D-46C9-913B-0AC196BD98ED}"/>
+                <a16:creationId xmlns:a16="http://schemas.microsoft.com/office/drawing/2014/main" id="{E7D41229-9DE2-454A-B184-6560633ED174}"/>
               </a:ext>
             </a:extLst>
           </p:cNvPr>
@@ -10209,7 +10409,7 @@
           <p:cNvPr id="5" name="">
             <a:extLst xmlns:a="http://schemas.openxmlformats.org/drawingml/2006/main">
               <a:ext uri="{FF2B5EF4-FFF2-40B4-BE49-F238E27FC236}">
-                <a16:creationId xmlns:a16="http://schemas.microsoft.com/office/drawing/2014/main" id="{7E46044A-D83A-4672-A316-67FCA9BFF642}"/>
+                <a16:creationId xmlns:a16="http://schemas.microsoft.com/office/drawing/2014/main" id="{CE849EFB-6F7D-4B4E-A4ED-29D368C6FE09}"/>
               </a:ext>
             </a:extLst>
           </p:cNvPr>
@@ -10266,7 +10466,7 @@
           <p:cNvPr id="6" name="">
             <a:extLst xmlns:a="http://schemas.openxmlformats.org/drawingml/2006/main">
               <a:ext uri="{FF2B5EF4-FFF2-40B4-BE49-F238E27FC236}">
-                <a16:creationId xmlns:a16="http://schemas.microsoft.com/office/drawing/2014/main" id="{0D23B917-1A6F-4081-8F2D-AA5AD975570C}"/>
+                <a16:creationId xmlns:a16="http://schemas.microsoft.com/office/drawing/2014/main" id="{F427D9B1-E93D-4F5D-9B4A-2741921A0443}"/>
               </a:ext>
             </a:extLst>
           </p:cNvPr>
@@ -10323,7 +10523,7 @@
           <p:cNvPr id="7" name="">
             <a:extLst xmlns:a="http://schemas.openxmlformats.org/drawingml/2006/main">
               <a:ext uri="{FF2B5EF4-FFF2-40B4-BE49-F238E27FC236}">
-                <a16:creationId xmlns:a16="http://schemas.microsoft.com/office/drawing/2014/main" id="{770A88DF-8A92-4680-B76F-64465DD9065F}"/>
+                <a16:creationId xmlns:a16="http://schemas.microsoft.com/office/drawing/2014/main" id="{58863285-0444-419D-89AC-2032E5976419}"/>
               </a:ext>
             </a:extLst>
           </p:cNvPr>
@@ -10355,7 +10555,7 @@
           <p:cNvPr id="8" name="">
             <a:extLst xmlns:a="http://schemas.openxmlformats.org/drawingml/2006/main">
               <a:ext uri="{FF2B5EF4-FFF2-40B4-BE49-F238E27FC236}">
-                <a16:creationId xmlns:a16="http://schemas.microsoft.com/office/drawing/2014/main" id="{273383EB-5ED2-43E8-A7B4-8DE3C608AC94}"/>
+                <a16:creationId xmlns:a16="http://schemas.microsoft.com/office/drawing/2014/main" id="{7619B50E-1926-4B44-AF7A-26EB265A3A75}"/>
               </a:ext>
             </a:extLst>
           </p:cNvPr>
@@ -10412,7 +10612,7 @@
           <p:cNvPr id="9" name="">
             <a:extLst xmlns:a="http://schemas.openxmlformats.org/drawingml/2006/main">
               <a:ext uri="{FF2B5EF4-FFF2-40B4-BE49-F238E27FC236}">
-                <a16:creationId xmlns:a16="http://schemas.microsoft.com/office/drawing/2014/main" id="{4D524D4F-74DD-4869-96C9-441236577570}"/>
+                <a16:creationId xmlns:a16="http://schemas.microsoft.com/office/drawing/2014/main" id="{94816943-6BAD-49F1-B3B3-7C5381C98692}"/>
               </a:ext>
             </a:extLst>
           </p:cNvPr>
@@ -10469,7 +10669,7 @@
           <p:cNvPr id="10" name="">
             <a:extLst xmlns:a="http://schemas.openxmlformats.org/drawingml/2006/main">
               <a:ext uri="{FF2B5EF4-FFF2-40B4-BE49-F238E27FC236}">
-                <a16:creationId xmlns:a16="http://schemas.microsoft.com/office/drawing/2014/main" id="{CA4E10B0-920C-4357-AAA8-70EE5987C93F}"/>
+                <a16:creationId xmlns:a16="http://schemas.microsoft.com/office/drawing/2014/main" id="{5BC857E0-8BFE-4506-B9F5-4A12D9235E18}"/>
               </a:ext>
             </a:extLst>
           </p:cNvPr>
@@ -10526,7 +10726,7 @@
           <p:cNvPr id="11" name="">
             <a:extLst xmlns:a="http://schemas.openxmlformats.org/drawingml/2006/main">
               <a:ext uri="{FF2B5EF4-FFF2-40B4-BE49-F238E27FC236}">
-                <a16:creationId xmlns:a16="http://schemas.microsoft.com/office/drawing/2014/main" id="{AF9C0CDC-AE95-4D90-8E98-4D87011AC04E}"/>
+                <a16:creationId xmlns:a16="http://schemas.microsoft.com/office/drawing/2014/main" id="{3851F25C-D592-4C8D-80F7-195CEB51D062}"/>
               </a:ext>
             </a:extLst>
           </p:cNvPr>
@@ -10583,7 +10783,7 @@
           <p:cNvPr id="12" name="">
             <a:extLst xmlns:a="http://schemas.openxmlformats.org/drawingml/2006/main">
               <a:ext uri="{FF2B5EF4-FFF2-40B4-BE49-F238E27FC236}">
-                <a16:creationId xmlns:a16="http://schemas.microsoft.com/office/drawing/2014/main" id="{B075A735-7C1D-4853-9726-2B8DDCEE5559}"/>
+                <a16:creationId xmlns:a16="http://schemas.microsoft.com/office/drawing/2014/main" id="{DD3E774E-75E2-486F-8B6F-EB65DDAFE648}"/>
               </a:ext>
             </a:extLst>
           </p:cNvPr>
@@ -10640,7 +10840,7 @@
           <p:cNvPr id="13" name="">
             <a:extLst xmlns:a="http://schemas.openxmlformats.org/drawingml/2006/main">
               <a:ext uri="{FF2B5EF4-FFF2-40B4-BE49-F238E27FC236}">
-                <a16:creationId xmlns:a16="http://schemas.microsoft.com/office/drawing/2014/main" id="{A40A6E97-9132-4335-8640-CCDA03CFC8E9}"/>
+                <a16:creationId xmlns:a16="http://schemas.microsoft.com/office/drawing/2014/main" id="{95466A0B-7FF7-48A7-A598-008840506BAB}"/>
               </a:ext>
             </a:extLst>
           </p:cNvPr>
@@ -10697,7 +10897,7 @@
           <p:cNvPr id="14" name="">
             <a:extLst xmlns:a="http://schemas.openxmlformats.org/drawingml/2006/main">
               <a:ext uri="{FF2B5EF4-FFF2-40B4-BE49-F238E27FC236}">
-                <a16:creationId xmlns:a16="http://schemas.microsoft.com/office/drawing/2014/main" id="{E49A27F1-5D9E-43BD-9518-E2320BD5F00B}"/>
+                <a16:creationId xmlns:a16="http://schemas.microsoft.com/office/drawing/2014/main" id="{AA44EBA4-475D-4674-BD0E-61C9F0BAB32E}"/>
               </a:ext>
             </a:extLst>
           </p:cNvPr>
@@ -10754,7 +10954,7 @@
           <p:cNvPr id="15" name="">
             <a:extLst xmlns:a="http://schemas.openxmlformats.org/drawingml/2006/main">
               <a:ext uri="{FF2B5EF4-FFF2-40B4-BE49-F238E27FC236}">
-                <a16:creationId xmlns:a16="http://schemas.microsoft.com/office/drawing/2014/main" id="{4AAB85A1-B8EC-4C1E-910C-9CBA2B7DE474}"/>
+                <a16:creationId xmlns:a16="http://schemas.microsoft.com/office/drawing/2014/main" id="{297B92E2-32FA-4263-96D4-4693C50AC95D}"/>
               </a:ext>
             </a:extLst>
           </p:cNvPr>
@@ -10809,7 +11009,7 @@
     </p:spTree>
     <p:extLst>
       <p:ext uri="{BB962C8B-B14F-4D97-AF65-F5344CB8AC3E}">
-        <p14:creationId xmlns:p14="http://schemas.microsoft.com/office/powerpoint/2010/main" val="571867722"/>
+        <p14:creationId xmlns:p14="http://schemas.microsoft.com/office/powerpoint/2010/main" val="555274895"/>
       </p:ext>
     </p:extLst>
   </p:cSld>
@@ -10964,7 +11164,7 @@
           <p:cNvPr id="16" name="">
             <a:extLst xmlns:a="http://schemas.openxmlformats.org/drawingml/2006/main">
               <a:ext uri="{FF2B5EF4-FFF2-40B4-BE49-F238E27FC236}">
-                <a16:creationId xmlns:a16="http://schemas.microsoft.com/office/drawing/2014/main" id="{E3477168-5580-43F5-A49B-F9C771BA7D49}"/>
+                <a16:creationId xmlns:a16="http://schemas.microsoft.com/office/drawing/2014/main" id="{B92CA10E-6079-448A-9EB5-ADC0B55138BD}"/>
               </a:ext>
             </a:extLst>
           </p:cNvPr>
@@ -10996,7 +11196,7 @@
           <p:cNvPr id="2" name="">
             <a:extLst xmlns:a="http://schemas.openxmlformats.org/drawingml/2006/main">
               <a:ext uri="{FF2B5EF4-FFF2-40B4-BE49-F238E27FC236}">
-                <a16:creationId xmlns:a16="http://schemas.microsoft.com/office/drawing/2014/main" id="{206CE089-97B0-4CDE-8E5F-3EBC7372AE6D}"/>
+                <a16:creationId xmlns:a16="http://schemas.microsoft.com/office/drawing/2014/main" id="{68EF3430-6BDC-436C-AF5A-9E852BD94CD8}"/>
               </a:ext>
             </a:extLst>
           </p:cNvPr>
@@ -11053,7 +11253,7 @@
           <p:cNvPr id="3" name="">
             <a:extLst xmlns:a="http://schemas.openxmlformats.org/drawingml/2006/main">
               <a:ext uri="{FF2B5EF4-FFF2-40B4-BE49-F238E27FC236}">
-                <a16:creationId xmlns:a16="http://schemas.microsoft.com/office/drawing/2014/main" id="{A4000260-DE3C-486E-986C-D4098B7839C0}"/>
+                <a16:creationId xmlns:a16="http://schemas.microsoft.com/office/drawing/2014/main" id="{27117748-F50E-469D-A641-03FDFA0F0D8F}"/>
               </a:ext>
             </a:extLst>
           </p:cNvPr>
@@ -11085,7 +11285,7 @@
           <p:cNvPr id="4" name="">
             <a:extLst xmlns:a="http://schemas.openxmlformats.org/drawingml/2006/main">
               <a:ext uri="{FF2B5EF4-FFF2-40B4-BE49-F238E27FC236}">
-                <a16:creationId xmlns:a16="http://schemas.microsoft.com/office/drawing/2014/main" id="{8565F795-2E30-44F1-ACA1-67762F4214AD}"/>
+                <a16:creationId xmlns:a16="http://schemas.microsoft.com/office/drawing/2014/main" id="{71506090-6A06-45CD-90AC-97EE133EEE4F}"/>
               </a:ext>
             </a:extLst>
           </p:cNvPr>
@@ -11142,7 +11342,7 @@
           <p:cNvPr id="5" name="">
             <a:extLst xmlns:a="http://schemas.openxmlformats.org/drawingml/2006/main">
               <a:ext uri="{FF2B5EF4-FFF2-40B4-BE49-F238E27FC236}">
-                <a16:creationId xmlns:a16="http://schemas.microsoft.com/office/drawing/2014/main" id="{B12AD987-4F92-4F5A-A601-557AB2EF2AAA}"/>
+                <a16:creationId xmlns:a16="http://schemas.microsoft.com/office/drawing/2014/main" id="{B1E41B30-469E-4B2C-B321-83258ED76576}"/>
               </a:ext>
             </a:extLst>
           </p:cNvPr>
@@ -11199,7 +11399,7 @@
           <p:cNvPr id="6" name="">
             <a:extLst xmlns:a="http://schemas.openxmlformats.org/drawingml/2006/main">
               <a:ext uri="{FF2B5EF4-FFF2-40B4-BE49-F238E27FC236}">
-                <a16:creationId xmlns:a16="http://schemas.microsoft.com/office/drawing/2014/main" id="{2FFC4301-300D-4A31-BE95-175E47ABCC09}"/>
+                <a16:creationId xmlns:a16="http://schemas.microsoft.com/office/drawing/2014/main" id="{4AA9407D-A07F-486F-A079-C8A71FFFAAEC}"/>
               </a:ext>
             </a:extLst>
           </p:cNvPr>
@@ -11256,7 +11456,7 @@
           <p:cNvPr id="7" name="">
             <a:extLst xmlns:a="http://schemas.openxmlformats.org/drawingml/2006/main">
               <a:ext uri="{FF2B5EF4-FFF2-40B4-BE49-F238E27FC236}">
-                <a16:creationId xmlns:a16="http://schemas.microsoft.com/office/drawing/2014/main" id="{D8EDE4E0-7E85-4C45-9D8E-2EB06A15A0AA}"/>
+                <a16:creationId xmlns:a16="http://schemas.microsoft.com/office/drawing/2014/main" id="{889565D9-9A46-4DDC-A3B2-063B6A183CDA}"/>
               </a:ext>
             </a:extLst>
           </p:cNvPr>
@@ -11288,7 +11488,7 @@
           <p:cNvPr id="8" name="">
             <a:extLst xmlns:a="http://schemas.openxmlformats.org/drawingml/2006/main">
               <a:ext uri="{FF2B5EF4-FFF2-40B4-BE49-F238E27FC236}">
-                <a16:creationId xmlns:a16="http://schemas.microsoft.com/office/drawing/2014/main" id="{9FBD7196-6F50-4249-83B3-C82E7D61AF7A}"/>
+                <a16:creationId xmlns:a16="http://schemas.microsoft.com/office/drawing/2014/main" id="{63F66DB4-BAE7-4445-80D5-4B5522C252E2}"/>
               </a:ext>
             </a:extLst>
           </p:cNvPr>
@@ -11345,7 +11545,7 @@
           <p:cNvPr id="9" name="">
             <a:extLst xmlns:a="http://schemas.openxmlformats.org/drawingml/2006/main">
               <a:ext uri="{FF2B5EF4-FFF2-40B4-BE49-F238E27FC236}">
-                <a16:creationId xmlns:a16="http://schemas.microsoft.com/office/drawing/2014/main" id="{A8ABA15A-030F-4B88-A4D4-7B166604EE25}"/>
+                <a16:creationId xmlns:a16="http://schemas.microsoft.com/office/drawing/2014/main" id="{1EF7355C-61BD-4B64-9B7C-B6FE46AFC6A1}"/>
               </a:ext>
             </a:extLst>
           </p:cNvPr>
@@ -11406,7 +11606,7 @@
           <p:nvPr/>
         </p:nvPicPr>
         <p:blipFill>
-          <a:blip xmlns:r="http://schemas.openxmlformats.org/officeDocument/2006/relationships" xmlns:a="http://schemas.openxmlformats.org/drawingml/2006/main" r:embed="R574b1ecc60ed450b"/>
+          <a:blip xmlns:r="http://schemas.openxmlformats.org/officeDocument/2006/relationships" xmlns:a="http://schemas.openxmlformats.org/drawingml/2006/main" r:embed="R81b63a6743984a4a"/>
           <a:stretch xmlns:a="http://schemas.openxmlformats.org/drawingml/2006/main"/>
         </p:blipFill>
         <p:spPr>
@@ -11424,7 +11624,7 @@
           <p:cNvPr id="11" name="">
             <a:extLst xmlns:a="http://schemas.openxmlformats.org/drawingml/2006/main">
               <a:ext uri="{FF2B5EF4-FFF2-40B4-BE49-F238E27FC236}">
-                <a16:creationId xmlns:a16="http://schemas.microsoft.com/office/drawing/2014/main" id="{0EB4C73A-E813-4407-8243-03EF1E01B6B8}"/>
+                <a16:creationId xmlns:a16="http://schemas.microsoft.com/office/drawing/2014/main" id="{2D482AEF-98C8-4E27-BF1B-0198C775C773}"/>
               </a:ext>
             </a:extLst>
           </p:cNvPr>
@@ -11481,7 +11681,7 @@
           <p:cNvPr id="12" name="">
             <a:extLst xmlns:a="http://schemas.openxmlformats.org/drawingml/2006/main">
               <a:ext uri="{FF2B5EF4-FFF2-40B4-BE49-F238E27FC236}">
-                <a16:creationId xmlns:a16="http://schemas.microsoft.com/office/drawing/2014/main" id="{5C44721C-A324-457B-BDC2-6879FF9868CC}"/>
+                <a16:creationId xmlns:a16="http://schemas.microsoft.com/office/drawing/2014/main" id="{9C7844A4-1A53-4F06-B07C-8BE33CFA0BE2}"/>
               </a:ext>
             </a:extLst>
           </p:cNvPr>
@@ -11538,7 +11738,7 @@
           <p:cNvPr id="13" name="">
             <a:extLst xmlns:a="http://schemas.openxmlformats.org/drawingml/2006/main">
               <a:ext uri="{FF2B5EF4-FFF2-40B4-BE49-F238E27FC236}">
-                <a16:creationId xmlns:a16="http://schemas.microsoft.com/office/drawing/2014/main" id="{73B62FFC-91DD-4012-A949-529F2D6745BC}"/>
+                <a16:creationId xmlns:a16="http://schemas.microsoft.com/office/drawing/2014/main" id="{FBD43448-01BE-4631-A295-9AEABCE3D1CF}"/>
               </a:ext>
             </a:extLst>
           </p:cNvPr>
@@ -11570,7 +11770,7 @@
           <p:cNvPr id="14" name="">
             <a:extLst xmlns:a="http://schemas.openxmlformats.org/drawingml/2006/main">
               <a:ext uri="{FF2B5EF4-FFF2-40B4-BE49-F238E27FC236}">
-                <a16:creationId xmlns:a16="http://schemas.microsoft.com/office/drawing/2014/main" id="{97E38A4F-F686-46D5-B277-7AA417DFC757}"/>
+                <a16:creationId xmlns:a16="http://schemas.microsoft.com/office/drawing/2014/main" id="{8C25388C-01AD-4449-970B-8B679BE1B81D}"/>
               </a:ext>
             </a:extLst>
           </p:cNvPr>
@@ -11627,7 +11827,7 @@
           <p:cNvPr id="15" name="">
             <a:extLst xmlns:a="http://schemas.openxmlformats.org/drawingml/2006/main">
               <a:ext uri="{FF2B5EF4-FFF2-40B4-BE49-F238E27FC236}">
-                <a16:creationId xmlns:a16="http://schemas.microsoft.com/office/drawing/2014/main" id="{F54F088D-FE07-4904-AB53-D59CEBDA9F32}"/>
+                <a16:creationId xmlns:a16="http://schemas.microsoft.com/office/drawing/2014/main" id="{02D7E488-14E8-449D-A8D5-4D47455A0166}"/>
               </a:ext>
             </a:extLst>
           </p:cNvPr>
@@ -11682,7 +11882,7 @@
     </p:spTree>
     <p:extLst>
       <p:ext uri="{BB962C8B-B14F-4D97-AF65-F5344CB8AC3E}">
-        <p14:creationId xmlns:p14="http://schemas.microsoft.com/office/powerpoint/2010/main" val="312408756"/>
+        <p14:creationId xmlns:p14="http://schemas.microsoft.com/office/powerpoint/2010/main" val="1119230750"/>
       </p:ext>
     </p:extLst>
   </p:cSld>
@@ -11837,7 +12037,7 @@
           <p:cNvPr id="23" name="">
             <a:extLst xmlns:a="http://schemas.openxmlformats.org/drawingml/2006/main">
               <a:ext uri="{FF2B5EF4-FFF2-40B4-BE49-F238E27FC236}">
-                <a16:creationId xmlns:a16="http://schemas.microsoft.com/office/drawing/2014/main" id="{FC74A115-A06B-4472-A9F2-62F8B4036F3D}"/>
+                <a16:creationId xmlns:a16="http://schemas.microsoft.com/office/drawing/2014/main" id="{1DAB0A07-55D3-4C5B-966B-304616B3741C}"/>
               </a:ext>
             </a:extLst>
           </p:cNvPr>
@@ -11869,7 +12069,7 @@
           <p:cNvPr id="2" name="">
             <a:extLst xmlns:a="http://schemas.openxmlformats.org/drawingml/2006/main">
               <a:ext uri="{FF2B5EF4-FFF2-40B4-BE49-F238E27FC236}">
-                <a16:creationId xmlns:a16="http://schemas.microsoft.com/office/drawing/2014/main" id="{DEB33182-AFFF-4909-AF0A-9D473BEFC819}"/>
+                <a16:creationId xmlns:a16="http://schemas.microsoft.com/office/drawing/2014/main" id="{8C29595A-4112-49DD-B29D-A5700EAD423F}"/>
               </a:ext>
             </a:extLst>
           </p:cNvPr>
@@ -11926,7 +12126,7 @@
           <p:cNvPr id="3" name="">
             <a:extLst xmlns:a="http://schemas.openxmlformats.org/drawingml/2006/main">
               <a:ext uri="{FF2B5EF4-FFF2-40B4-BE49-F238E27FC236}">
-                <a16:creationId xmlns:a16="http://schemas.microsoft.com/office/drawing/2014/main" id="{E69F2648-DFB9-4B85-A8E0-6768929DD7DD}"/>
+                <a16:creationId xmlns:a16="http://schemas.microsoft.com/office/drawing/2014/main" id="{F06A4C5B-CE18-4F5B-BEFB-D2A2AFD297AC}"/>
               </a:ext>
             </a:extLst>
           </p:cNvPr>
@@ -11958,7 +12158,7 @@
           <p:cNvPr id="4" name="">
             <a:extLst xmlns:a="http://schemas.openxmlformats.org/drawingml/2006/main">
               <a:ext uri="{FF2B5EF4-FFF2-40B4-BE49-F238E27FC236}">
-                <a16:creationId xmlns:a16="http://schemas.microsoft.com/office/drawing/2014/main" id="{F54C0975-86F2-40F8-BE41-B01B6816B8C7}"/>
+                <a16:creationId xmlns:a16="http://schemas.microsoft.com/office/drawing/2014/main" id="{C5294746-C181-43AF-98B4-C9319BDC7F44}"/>
               </a:ext>
             </a:extLst>
           </p:cNvPr>
@@ -12015,7 +12215,7 @@
           <p:cNvPr id="5" name="">
             <a:extLst xmlns:a="http://schemas.openxmlformats.org/drawingml/2006/main">
               <a:ext uri="{FF2B5EF4-FFF2-40B4-BE49-F238E27FC236}">
-                <a16:creationId xmlns:a16="http://schemas.microsoft.com/office/drawing/2014/main" id="{D8D846D5-45AD-45CE-A2A5-9AD6304C01EA}"/>
+                <a16:creationId xmlns:a16="http://schemas.microsoft.com/office/drawing/2014/main" id="{B704A8C6-09DF-4C9B-A1DF-7BFBF8FFFB2B}"/>
               </a:ext>
             </a:extLst>
           </p:cNvPr>
@@ -12072,7 +12272,7 @@
           <p:cNvPr id="6" name="">
             <a:extLst xmlns:a="http://schemas.openxmlformats.org/drawingml/2006/main">
               <a:ext uri="{FF2B5EF4-FFF2-40B4-BE49-F238E27FC236}">
-                <a16:creationId xmlns:a16="http://schemas.microsoft.com/office/drawing/2014/main" id="{1A5AE5F0-08A0-4D9E-A80D-E4F97173750B}"/>
+                <a16:creationId xmlns:a16="http://schemas.microsoft.com/office/drawing/2014/main" id="{3C1E343D-3EF2-4FD1-BBD6-C0A0D288F385}"/>
               </a:ext>
             </a:extLst>
           </p:cNvPr>
@@ -12129,7 +12329,7 @@
           <p:cNvPr id="7" name="">
             <a:extLst xmlns:a="http://schemas.openxmlformats.org/drawingml/2006/main">
               <a:ext uri="{FF2B5EF4-FFF2-40B4-BE49-F238E27FC236}">
-                <a16:creationId xmlns:a16="http://schemas.microsoft.com/office/drawing/2014/main" id="{D7588B33-BBA1-4FFA-945E-79B69702EEE4}"/>
+                <a16:creationId xmlns:a16="http://schemas.microsoft.com/office/drawing/2014/main" id="{4C47796E-B3CB-4720-B399-5BE8E8F1725F}"/>
               </a:ext>
             </a:extLst>
           </p:cNvPr>
@@ -12161,7 +12361,7 @@
           <p:cNvPr id="8" name="">
             <a:extLst xmlns:a="http://schemas.openxmlformats.org/drawingml/2006/main">
               <a:ext uri="{FF2B5EF4-FFF2-40B4-BE49-F238E27FC236}">
-                <a16:creationId xmlns:a16="http://schemas.microsoft.com/office/drawing/2014/main" id="{4B3CE5F3-1BA9-44DA-A789-C017E23294BC}"/>
+                <a16:creationId xmlns:a16="http://schemas.microsoft.com/office/drawing/2014/main" id="{0363C57F-A881-4AED-8038-2B72A60F2E8F}"/>
               </a:ext>
             </a:extLst>
           </p:cNvPr>
@@ -12218,7 +12418,7 @@
           <p:cNvPr id="9" name="">
             <a:extLst xmlns:a="http://schemas.openxmlformats.org/drawingml/2006/main">
               <a:ext uri="{FF2B5EF4-FFF2-40B4-BE49-F238E27FC236}">
-                <a16:creationId xmlns:a16="http://schemas.microsoft.com/office/drawing/2014/main" id="{21956EA0-CAF3-4FFF-AA86-17B2CE3C859B}"/>
+                <a16:creationId xmlns:a16="http://schemas.microsoft.com/office/drawing/2014/main" id="{A0F39D34-5D55-4533-94C3-8AF9DC627215}"/>
               </a:ext>
             </a:extLst>
           </p:cNvPr>
@@ -12275,7 +12475,7 @@
           <p:cNvPr id="10" name="">
             <a:extLst xmlns:a="http://schemas.openxmlformats.org/drawingml/2006/main">
               <a:ext uri="{FF2B5EF4-FFF2-40B4-BE49-F238E27FC236}">
-                <a16:creationId xmlns:a16="http://schemas.microsoft.com/office/drawing/2014/main" id="{854142D1-0CF8-43B1-B665-5AB191CFFB60}"/>
+                <a16:creationId xmlns:a16="http://schemas.microsoft.com/office/drawing/2014/main" id="{D1D92C37-99D6-470A-84FC-BBD7B37A0397}"/>
               </a:ext>
             </a:extLst>
           </p:cNvPr>
@@ -12309,7 +12509,7 @@
           <p:cNvPr id="11" name="">
             <a:extLst xmlns:a="http://schemas.openxmlformats.org/drawingml/2006/main">
               <a:ext uri="{FF2B5EF4-FFF2-40B4-BE49-F238E27FC236}">
-                <a16:creationId xmlns:a16="http://schemas.microsoft.com/office/drawing/2014/main" id="{3BB0B255-8657-48C6-BF30-19FD862EAB89}"/>
+                <a16:creationId xmlns:a16="http://schemas.microsoft.com/office/drawing/2014/main" id="{41A39C20-C7F8-4229-BFEB-59A19E52E6B5}"/>
               </a:ext>
             </a:extLst>
           </p:cNvPr>
@@ -12341,7 +12541,7 @@
           <p:cNvPr id="12" name="">
             <a:extLst xmlns:a="http://schemas.openxmlformats.org/drawingml/2006/main">
               <a:ext uri="{FF2B5EF4-FFF2-40B4-BE49-F238E27FC236}">
-                <a16:creationId xmlns:a16="http://schemas.microsoft.com/office/drawing/2014/main" id="{BB132ECF-2CDB-44B1-BAE5-679A7E65478B}"/>
+                <a16:creationId xmlns:a16="http://schemas.microsoft.com/office/drawing/2014/main" id="{7AD8BA9D-C0D6-4B08-A8CB-E5FFACE563F2}"/>
               </a:ext>
             </a:extLst>
           </p:cNvPr>
@@ -12398,7 +12598,7 @@
           <p:cNvPr id="13" name="">
             <a:extLst xmlns:a="http://schemas.openxmlformats.org/drawingml/2006/main">
               <a:ext uri="{FF2B5EF4-FFF2-40B4-BE49-F238E27FC236}">
-                <a16:creationId xmlns:a16="http://schemas.microsoft.com/office/drawing/2014/main" id="{1BAE9219-9C34-460F-A116-80751C24E2EE}"/>
+                <a16:creationId xmlns:a16="http://schemas.microsoft.com/office/drawing/2014/main" id="{B2B67B47-C79D-4258-A4AD-07ABAABEB8E6}"/>
               </a:ext>
             </a:extLst>
           </p:cNvPr>
@@ -12455,7 +12655,7 @@
           <p:cNvPr id="14" name="">
             <a:extLst xmlns:a="http://schemas.openxmlformats.org/drawingml/2006/main">
               <a:ext uri="{FF2B5EF4-FFF2-40B4-BE49-F238E27FC236}">
-                <a16:creationId xmlns:a16="http://schemas.microsoft.com/office/drawing/2014/main" id="{05DE4B8B-E853-4310-B365-4BE1F6BD52B5}"/>
+                <a16:creationId xmlns:a16="http://schemas.microsoft.com/office/drawing/2014/main" id="{F73A4BC0-4CF5-41D2-9768-AE4D8D452DD4}"/>
               </a:ext>
             </a:extLst>
           </p:cNvPr>
@@ -12489,7 +12689,7 @@
           <p:cNvPr id="15" name="">
             <a:extLst xmlns:a="http://schemas.openxmlformats.org/drawingml/2006/main">
               <a:ext uri="{FF2B5EF4-FFF2-40B4-BE49-F238E27FC236}">
-                <a16:creationId xmlns:a16="http://schemas.microsoft.com/office/drawing/2014/main" id="{2510803E-6EB0-4EE7-A888-0198097BA199}"/>
+                <a16:creationId xmlns:a16="http://schemas.microsoft.com/office/drawing/2014/main" id="{65370055-0C43-4226-893C-FC110A9BADB7}"/>
               </a:ext>
             </a:extLst>
           </p:cNvPr>
@@ -12521,7 +12721,7 @@
           <p:cNvPr id="16" name="">
             <a:extLst xmlns:a="http://schemas.openxmlformats.org/drawingml/2006/main">
               <a:ext uri="{FF2B5EF4-FFF2-40B4-BE49-F238E27FC236}">
-                <a16:creationId xmlns:a16="http://schemas.microsoft.com/office/drawing/2014/main" id="{A6A28901-624A-4B1C-8092-0B895C9C158F}"/>
+                <a16:creationId xmlns:a16="http://schemas.microsoft.com/office/drawing/2014/main" id="{08CC9D36-04CF-4BD2-A8F6-AABF3CC7FCF8}"/>
               </a:ext>
             </a:extLst>
           </p:cNvPr>
@@ -12578,7 +12778,7 @@
           <p:cNvPr id="17" name="">
             <a:extLst xmlns:a="http://schemas.openxmlformats.org/drawingml/2006/main">
               <a:ext uri="{FF2B5EF4-FFF2-40B4-BE49-F238E27FC236}">
-                <a16:creationId xmlns:a16="http://schemas.microsoft.com/office/drawing/2014/main" id="{03D3ACFE-2CBF-4A6F-8A70-DD178078DD7D}"/>
+                <a16:creationId xmlns:a16="http://schemas.microsoft.com/office/drawing/2014/main" id="{734911AA-4E82-4755-A2EC-B4F4E09771F7}"/>
               </a:ext>
             </a:extLst>
           </p:cNvPr>
@@ -12635,7 +12835,7 @@
           <p:cNvPr id="18" name="">
             <a:extLst xmlns:a="http://schemas.openxmlformats.org/drawingml/2006/main">
               <a:ext uri="{FF2B5EF4-FFF2-40B4-BE49-F238E27FC236}">
-                <a16:creationId xmlns:a16="http://schemas.microsoft.com/office/drawing/2014/main" id="{5E0FF280-479A-4CF0-818D-71EE8CCEA344}"/>
+                <a16:creationId xmlns:a16="http://schemas.microsoft.com/office/drawing/2014/main" id="{21ADDBFB-8A94-431B-A26A-9680338314CD}"/>
               </a:ext>
             </a:extLst>
           </p:cNvPr>
@@ -12669,7 +12869,7 @@
           <p:cNvPr id="19" name="">
             <a:extLst xmlns:a="http://schemas.openxmlformats.org/drawingml/2006/main">
               <a:ext uri="{FF2B5EF4-FFF2-40B4-BE49-F238E27FC236}">
-                <a16:creationId xmlns:a16="http://schemas.microsoft.com/office/drawing/2014/main" id="{AE8AB95C-0A25-4D6F-8A54-E176AD6CD675}"/>
+                <a16:creationId xmlns:a16="http://schemas.microsoft.com/office/drawing/2014/main" id="{F2F79CE7-A17B-4A45-9DAC-500BB5DEDCB1}"/>
               </a:ext>
             </a:extLst>
           </p:cNvPr>
@@ -12701,7 +12901,7 @@
           <p:cNvPr id="20" name="">
             <a:extLst xmlns:a="http://schemas.openxmlformats.org/drawingml/2006/main">
               <a:ext uri="{FF2B5EF4-FFF2-40B4-BE49-F238E27FC236}">
-                <a16:creationId xmlns:a16="http://schemas.microsoft.com/office/drawing/2014/main" id="{DB9E6768-6E35-47E3-AAE4-7E3181218CF9}"/>
+                <a16:creationId xmlns:a16="http://schemas.microsoft.com/office/drawing/2014/main" id="{64538C34-5507-4AC7-861F-50275CDE6E83}"/>
               </a:ext>
             </a:extLst>
           </p:cNvPr>
@@ -12758,7 +12958,7 @@
           <p:cNvPr id="21" name="">
             <a:extLst xmlns:a="http://schemas.openxmlformats.org/drawingml/2006/main">
               <a:ext uri="{FF2B5EF4-FFF2-40B4-BE49-F238E27FC236}">
-                <a16:creationId xmlns:a16="http://schemas.microsoft.com/office/drawing/2014/main" id="{FBAC9DE6-DA4A-4D66-9F69-287D9DD1FEAE}"/>
+                <a16:creationId xmlns:a16="http://schemas.microsoft.com/office/drawing/2014/main" id="{A66C2433-0F16-44A3-8BFF-C7D2AB17CF76}"/>
               </a:ext>
             </a:extLst>
           </p:cNvPr>
@@ -12815,7 +13015,7 @@
           <p:cNvPr id="22" name="">
             <a:extLst xmlns:a="http://schemas.openxmlformats.org/drawingml/2006/main">
               <a:ext uri="{FF2B5EF4-FFF2-40B4-BE49-F238E27FC236}">
-                <a16:creationId xmlns:a16="http://schemas.microsoft.com/office/drawing/2014/main" id="{5F471D0A-EA1B-4B39-859B-FE860CA78015}"/>
+                <a16:creationId xmlns:a16="http://schemas.microsoft.com/office/drawing/2014/main" id="{0EA24068-81EE-4808-BF6E-8AD152E39265}"/>
               </a:ext>
             </a:extLst>
           </p:cNvPr>
@@ -12870,7 +13070,7 @@
     </p:spTree>
     <p:extLst>
       <p:ext uri="{BB962C8B-B14F-4D97-AF65-F5344CB8AC3E}">
-        <p14:creationId xmlns:p14="http://schemas.microsoft.com/office/powerpoint/2010/main" val="1798989494"/>
+        <p14:creationId xmlns:p14="http://schemas.microsoft.com/office/powerpoint/2010/main" val="334074080"/>
       </p:ext>
     </p:extLst>
   </p:cSld>
@@ -13071,7 +13271,7 @@
           <p:cNvPr id="22" name="">
             <a:extLst xmlns:a="http://schemas.openxmlformats.org/drawingml/2006/main">
               <a:ext uri="{FF2B5EF4-FFF2-40B4-BE49-F238E27FC236}">
-                <a16:creationId xmlns:a16="http://schemas.microsoft.com/office/drawing/2014/main" id="{BBA7015A-40F9-476C-8537-02A383C03F16}"/>
+                <a16:creationId xmlns:a16="http://schemas.microsoft.com/office/drawing/2014/main" id="{E4983FD7-4B41-4BB5-A704-F355A02C6608}"/>
               </a:ext>
             </a:extLst>
           </p:cNvPr>
@@ -13103,7 +13303,7 @@
           <p:cNvPr id="2" name="">
             <a:extLst xmlns:a="http://schemas.openxmlformats.org/drawingml/2006/main">
               <a:ext uri="{FF2B5EF4-FFF2-40B4-BE49-F238E27FC236}">
-                <a16:creationId xmlns:a16="http://schemas.microsoft.com/office/drawing/2014/main" id="{3E9FD7A6-4DD6-4181-9D94-62CDC80300B6}"/>
+                <a16:creationId xmlns:a16="http://schemas.microsoft.com/office/drawing/2014/main" id="{54D4FE0A-2A39-4230-AFDC-D49212601BA0}"/>
               </a:ext>
             </a:extLst>
           </p:cNvPr>
@@ -13160,7 +13360,7 @@
           <p:cNvPr id="3" name="">
             <a:extLst xmlns:a="http://schemas.openxmlformats.org/drawingml/2006/main">
               <a:ext uri="{FF2B5EF4-FFF2-40B4-BE49-F238E27FC236}">
-                <a16:creationId xmlns:a16="http://schemas.microsoft.com/office/drawing/2014/main" id="{7AF004B5-63B8-48F0-88CC-134C7F8BAD74}"/>
+                <a16:creationId xmlns:a16="http://schemas.microsoft.com/office/drawing/2014/main" id="{C1A72719-F8A8-4938-B6C2-52874F6015D1}"/>
               </a:ext>
             </a:extLst>
           </p:cNvPr>
@@ -13192,7 +13392,7 @@
           <p:cNvPr id="4" name="">
             <a:extLst xmlns:a="http://schemas.openxmlformats.org/drawingml/2006/main">
               <a:ext uri="{FF2B5EF4-FFF2-40B4-BE49-F238E27FC236}">
-                <a16:creationId xmlns:a16="http://schemas.microsoft.com/office/drawing/2014/main" id="{CBF408D0-8901-4086-B6AA-90EADE6C78DD}"/>
+                <a16:creationId xmlns:a16="http://schemas.microsoft.com/office/drawing/2014/main" id="{1A7F1409-809C-4418-B2F2-3563C64A962E}"/>
               </a:ext>
             </a:extLst>
           </p:cNvPr>
@@ -13249,7 +13449,7 @@
           <p:cNvPr id="5" name="">
             <a:extLst xmlns:a="http://schemas.openxmlformats.org/drawingml/2006/main">
               <a:ext uri="{FF2B5EF4-FFF2-40B4-BE49-F238E27FC236}">
-                <a16:creationId xmlns:a16="http://schemas.microsoft.com/office/drawing/2014/main" id="{59CE5783-DB7D-431B-A21A-376D4B2A3655}"/>
+                <a16:creationId xmlns:a16="http://schemas.microsoft.com/office/drawing/2014/main" id="{D61A1C4D-A449-46B3-BF44-C6925CE6BD30}"/>
               </a:ext>
             </a:extLst>
           </p:cNvPr>
@@ -13306,7 +13506,7 @@
           <p:cNvPr id="6" name="">
             <a:extLst xmlns:a="http://schemas.openxmlformats.org/drawingml/2006/main">
               <a:ext uri="{FF2B5EF4-FFF2-40B4-BE49-F238E27FC236}">
-                <a16:creationId xmlns:a16="http://schemas.microsoft.com/office/drawing/2014/main" id="{B3A0EE4B-CA40-491E-BD24-579FACB09208}"/>
+                <a16:creationId xmlns:a16="http://schemas.microsoft.com/office/drawing/2014/main" id="{BBA44011-DE5C-4A6F-A6BC-EA63F7119D32}"/>
               </a:ext>
             </a:extLst>
           </p:cNvPr>
@@ -13363,7 +13563,7 @@
           <p:cNvPr id="7" name="">
             <a:extLst xmlns:a="http://schemas.openxmlformats.org/drawingml/2006/main">
               <a:ext uri="{FF2B5EF4-FFF2-40B4-BE49-F238E27FC236}">
-                <a16:creationId xmlns:a16="http://schemas.microsoft.com/office/drawing/2014/main" id="{54C59F4C-A399-4898-BDCF-E2425FA5928D}"/>
+                <a16:creationId xmlns:a16="http://schemas.microsoft.com/office/drawing/2014/main" id="{EFFBD030-52BC-4157-AB2E-921389143F91}"/>
               </a:ext>
             </a:extLst>
           </p:cNvPr>
@@ -13395,7 +13595,7 @@
           <p:cNvPr id="8" name="">
             <a:extLst xmlns:a="http://schemas.openxmlformats.org/drawingml/2006/main">
               <a:ext uri="{FF2B5EF4-FFF2-40B4-BE49-F238E27FC236}">
-                <a16:creationId xmlns:a16="http://schemas.microsoft.com/office/drawing/2014/main" id="{A2C88202-E997-4D30-ABA9-7688172F2A34}"/>
+                <a16:creationId xmlns:a16="http://schemas.microsoft.com/office/drawing/2014/main" id="{6DE15F01-82FB-42CC-9EC4-FFBCFCA6CA69}"/>
               </a:ext>
             </a:extLst>
           </p:cNvPr>
@@ -13452,7 +13652,7 @@
           <p:cNvPr id="9" name="">
             <a:extLst xmlns:a="http://schemas.openxmlformats.org/drawingml/2006/main">
               <a:ext uri="{FF2B5EF4-FFF2-40B4-BE49-F238E27FC236}">
-                <a16:creationId xmlns:a16="http://schemas.microsoft.com/office/drawing/2014/main" id="{4982A198-5FB0-4511-87D5-EFF4A6F9E504}"/>
+                <a16:creationId xmlns:a16="http://schemas.microsoft.com/office/drawing/2014/main" id="{F6A6780C-3515-4D7E-B2A5-91F3439BBC0A}"/>
               </a:ext>
             </a:extLst>
           </p:cNvPr>
@@ -13509,7 +13709,7 @@
           <p:cNvPr id="10" name="">
             <a:extLst xmlns:a="http://schemas.openxmlformats.org/drawingml/2006/main">
               <a:ext uri="{FF2B5EF4-FFF2-40B4-BE49-F238E27FC236}">
-                <a16:creationId xmlns:a16="http://schemas.microsoft.com/office/drawing/2014/main" id="{A5C7D8FB-5540-4626-B05B-4E249AA9F9D2}"/>
+                <a16:creationId xmlns:a16="http://schemas.microsoft.com/office/drawing/2014/main" id="{29996844-F624-405A-8AB0-BA8ED6A0A4ED}"/>
               </a:ext>
             </a:extLst>
           </p:cNvPr>
@@ -13543,7 +13743,7 @@
           <p:cNvPr id="11" name="">
             <a:extLst xmlns:a="http://schemas.openxmlformats.org/drawingml/2006/main">
               <a:ext uri="{FF2B5EF4-FFF2-40B4-BE49-F238E27FC236}">
-                <a16:creationId xmlns:a16="http://schemas.microsoft.com/office/drawing/2014/main" id="{DD302FD8-E9D7-45E7-AFB9-E9AE5E238F62}"/>
+                <a16:creationId xmlns:a16="http://schemas.microsoft.com/office/drawing/2014/main" id="{90687579-FA37-49AB-80B7-EFC80F5D3EB3}"/>
               </a:ext>
             </a:extLst>
           </p:cNvPr>
@@ -13575,7 +13775,7 @@
           <p:cNvPr id="12" name="">
             <a:extLst xmlns:a="http://schemas.openxmlformats.org/drawingml/2006/main">
               <a:ext uri="{FF2B5EF4-FFF2-40B4-BE49-F238E27FC236}">
-                <a16:creationId xmlns:a16="http://schemas.microsoft.com/office/drawing/2014/main" id="{74CF6D58-A5C9-4F51-B297-01592434A356}"/>
+                <a16:creationId xmlns:a16="http://schemas.microsoft.com/office/drawing/2014/main" id="{00D1F2C0-00F4-4B4B-B6E2-60E968E6E834}"/>
               </a:ext>
             </a:extLst>
           </p:cNvPr>
@@ -13632,7 +13832,7 @@
           <p:cNvPr id="13" name="">
             <a:extLst xmlns:a="http://schemas.openxmlformats.org/drawingml/2006/main">
               <a:ext uri="{FF2B5EF4-FFF2-40B4-BE49-F238E27FC236}">
-                <a16:creationId xmlns:a16="http://schemas.microsoft.com/office/drawing/2014/main" id="{5D201F8A-9AC0-45DC-AB90-96A877FD6C5F}"/>
+                <a16:creationId xmlns:a16="http://schemas.microsoft.com/office/drawing/2014/main" id="{2C6D9876-BA9E-4212-9055-0459F2D38644}"/>
               </a:ext>
             </a:extLst>
           </p:cNvPr>
@@ -13689,7 +13889,7 @@
           <p:cNvPr id="14" name="">
             <a:extLst xmlns:a="http://schemas.openxmlformats.org/drawingml/2006/main">
               <a:ext uri="{FF2B5EF4-FFF2-40B4-BE49-F238E27FC236}">
-                <a16:creationId xmlns:a16="http://schemas.microsoft.com/office/drawing/2014/main" id="{51279B8B-E804-47C4-9046-FA509E28E2DF}"/>
+                <a16:creationId xmlns:a16="http://schemas.microsoft.com/office/drawing/2014/main" id="{F1355667-A22B-4DA0-A5A2-C84BBFB44EA1}"/>
               </a:ext>
             </a:extLst>
           </p:cNvPr>
@@ -13723,7 +13923,7 @@
           <p:cNvPr id="15" name="">
             <a:extLst xmlns:a="http://schemas.openxmlformats.org/drawingml/2006/main">
               <a:ext uri="{FF2B5EF4-FFF2-40B4-BE49-F238E27FC236}">
-                <a16:creationId xmlns:a16="http://schemas.microsoft.com/office/drawing/2014/main" id="{0D1FFBB4-DCF8-4D1B-8159-36DC63F8229D}"/>
+                <a16:creationId xmlns:a16="http://schemas.microsoft.com/office/drawing/2014/main" id="{5640A4E5-1C99-4C84-B719-4B8D7D6357BB}"/>
               </a:ext>
             </a:extLst>
           </p:cNvPr>
@@ -13755,7 +13955,7 @@
           <p:cNvPr id="16" name="">
             <a:extLst xmlns:a="http://schemas.openxmlformats.org/drawingml/2006/main">
               <a:ext uri="{FF2B5EF4-FFF2-40B4-BE49-F238E27FC236}">
-                <a16:creationId xmlns:a16="http://schemas.microsoft.com/office/drawing/2014/main" id="{377BED7B-209E-48B2-BB97-785CBCF185A0}"/>
+                <a16:creationId xmlns:a16="http://schemas.microsoft.com/office/drawing/2014/main" id="{E989AD4F-8973-49BC-919C-4CE9F1572772}"/>
               </a:ext>
             </a:extLst>
           </p:cNvPr>
@@ -13812,7 +14012,7 @@
           <p:cNvPr id="17" name="">
             <a:extLst xmlns:a="http://schemas.openxmlformats.org/drawingml/2006/main">
               <a:ext uri="{FF2B5EF4-FFF2-40B4-BE49-F238E27FC236}">
-                <a16:creationId xmlns:a16="http://schemas.microsoft.com/office/drawing/2014/main" id="{1054267E-BB1C-417B-957F-5D71D7E034F0}"/>
+                <a16:creationId xmlns:a16="http://schemas.microsoft.com/office/drawing/2014/main" id="{4D280E20-FBF7-4443-B451-2140566A13C9}"/>
               </a:ext>
             </a:extLst>
           </p:cNvPr>
@@ -13869,7 +14069,7 @@
           <p:cNvPr id="18" name="">
             <a:extLst xmlns:a="http://schemas.openxmlformats.org/drawingml/2006/main">
               <a:ext uri="{FF2B5EF4-FFF2-40B4-BE49-F238E27FC236}">
-                <a16:creationId xmlns:a16="http://schemas.microsoft.com/office/drawing/2014/main" id="{9097F94E-B04D-45D3-8706-7A6DF4104499}"/>
+                <a16:creationId xmlns:a16="http://schemas.microsoft.com/office/drawing/2014/main" id="{4123EB41-0CB0-4717-86F2-9089B70026ED}"/>
               </a:ext>
             </a:extLst>
           </p:cNvPr>
@@ -13903,7 +14103,7 @@
           <p:cNvPr id="19" name="">
             <a:extLst xmlns:a="http://schemas.openxmlformats.org/drawingml/2006/main">
               <a:ext uri="{FF2B5EF4-FFF2-40B4-BE49-F238E27FC236}">
-                <a16:creationId xmlns:a16="http://schemas.microsoft.com/office/drawing/2014/main" id="{8E952EA7-8A49-42C4-8B76-E4A9E1688BEB}"/>
+                <a16:creationId xmlns:a16="http://schemas.microsoft.com/office/drawing/2014/main" id="{1A3E8C50-3160-4993-9EB2-DF5C38FD7403}"/>
               </a:ext>
             </a:extLst>
           </p:cNvPr>
@@ -13935,7 +14135,7 @@
           <p:cNvPr id="20" name="">
             <a:extLst xmlns:a="http://schemas.openxmlformats.org/drawingml/2006/main">
               <a:ext uri="{FF2B5EF4-FFF2-40B4-BE49-F238E27FC236}">
-                <a16:creationId xmlns:a16="http://schemas.microsoft.com/office/drawing/2014/main" id="{15966176-E42A-4D68-A69B-3A6FCB66118A}"/>
+                <a16:creationId xmlns:a16="http://schemas.microsoft.com/office/drawing/2014/main" id="{C407D062-AC56-4F32-83CC-C9286DDDCC9E}"/>
               </a:ext>
             </a:extLst>
           </p:cNvPr>
@@ -13992,7 +14192,7 @@
           <p:cNvPr id="21" name="">
             <a:extLst xmlns:a="http://schemas.openxmlformats.org/drawingml/2006/main">
               <a:ext uri="{FF2B5EF4-FFF2-40B4-BE49-F238E27FC236}">
-                <a16:creationId xmlns:a16="http://schemas.microsoft.com/office/drawing/2014/main" id="{57561BF2-C00F-4A39-8EB8-09517457C7C8}"/>
+                <a16:creationId xmlns:a16="http://schemas.microsoft.com/office/drawing/2014/main" id="{31595395-7EDD-4753-9B13-DBFC9AF4AE83}"/>
               </a:ext>
             </a:extLst>
           </p:cNvPr>
@@ -14047,7 +14247,7 @@
     </p:spTree>
     <p:extLst>
       <p:ext uri="{BB962C8B-B14F-4D97-AF65-F5344CB8AC3E}">
-        <p14:creationId xmlns:p14="http://schemas.microsoft.com/office/powerpoint/2010/main" val="1998040860"/>
+        <p14:creationId xmlns:p14="http://schemas.microsoft.com/office/powerpoint/2010/main" val="468151189"/>
       </p:ext>
     </p:extLst>
   </p:cSld>
